--- a/templates/office/EMP_DEG_090_시스템아키텍처구성도.pptx
+++ b/templates/office/EMP_DEG_090_시스템아키텍처구성도.pptx
@@ -7290,7 +7290,7 @@
                 <a:cs typeface="Malgun Gothic"/>
                 <a:sym typeface="Malgun Gothic"/>
               </a:rPr>
-              <a:t>SyncGuard AI 시스템 구축</a:t>
+              <a:t>SyncFlow AI 시스템 구축</a:t>
             </a:r>
             <a:endParaRPr b="0" i="0" sz="1400" u="none" cap="none" strike="noStrike">
               <a:solidFill>
@@ -7422,7 +7422,7 @@
                 <a:cs typeface="Malgun Gothic"/>
                 <a:sym typeface="Malgun Gothic"/>
               </a:rPr>
-              <a:t>마케팅허브·프로덕트랩 연계 · AWS EKS 5대 모듈(통합 웹 Client/fe / 업무 BE / 대외연계 API / AI Agent / Batch) · PostgreSQL 16(pgvector 1536d)</a:t>
+              <a:t>전자구매포털·피엘엠넥서스 연계 · AWS EKS 5대 모듈(통합 웹 Client/fe / 업무 BE / 대외연계 API / AI Agent / Batch) · PostgreSQL 16(pgvector 1536d)</a:t>
             </a:r>
             <a:endParaRPr b="0" i="0" sz="1400" u="none" cap="none" strike="noStrike">
               <a:solidFill>
@@ -7621,7 +7621,7 @@
                 <a:cs typeface="Malgun Gothic"/>
                 <a:sym typeface="Malgun Gothic"/>
               </a:rPr>
-              <a:t>한빛글로벌 SyncGuard AI 시스템 구축</a:t>
+              <a:t>한빛글로벌 SyncFlow AI 시스템 구축</a:t>
             </a:r>
             <a:endParaRPr b="0" i="0" sz="1400" u="none" cap="none" strike="noStrike">
               <a:solidFill>
@@ -7750,7 +7750,7 @@
                 </a:solidFill>
                 <a:latin typeface="Malgun Gothic"/>
               </a:rPr>
-              <a:t>v1.3 (BO/대외연계 ALB 분리 · BE/API➔Agent 호출 · AI 피크프레임+웹 장면보정 · S3 Intelligent-Tiering · AP 기본스펙 · 방화벽 URL 반영)</a:t>
+              <a:t>v1.3 (BO/대외연계 ALB 분리 · BE/API➔Agent 호출 · AI 도면스냅샷+웹 장면보정 · S3 Intelligent-Tiering · HB 표준스펙 · 방화벽 URL 반영)</a:t>
             </a:r>
             <a:endParaRPr b="0" i="0" sz="950" u="none" cap="none" strike="noStrike">
               <a:solidFill>
@@ -8539,7 +8539,7 @@
                 <a:cs typeface="Malgun Gothic"/>
                 <a:sym typeface="Malgun Gothic"/>
               </a:rPr>
-              <a:t>사내 SSO/IAM · MarketingHub(의뢰/결과 HTML·JSON 연동) · ProductLab(02:00배치) · 네이버/패들OCR</a:t>
+              <a:t>사내 SSO/IAM · SRM-Portal(의뢰/결과 HTML·JSON 연동) · PLM-Nexus(02:00배치) · 엔터프라이즈 비전/패들OCR</a:t>
             </a:r>
             <a:endParaRPr b="0" i="0" sz="950" u="none" cap="none" strike="noStrike">
               <a:solidFill>
@@ -9092,7 +9092,7 @@
             <a:r>
               <a:rPr b="1" i="0" lang="en-US" sz="800" u="none" cap="none" strike="noStrike">
                 <a:solidFill>
-                  <a:srgbClr val="1E293B"/>
+                  <a:srgbClr val="0F2942"/>
                 </a:solidFill>
                 <a:latin typeface="Malgun Gothic"/>
                 <a:ea typeface="Malgun Gothic"/>
@@ -9162,7 +9162,7 @@
                 </a:solidFill>
                 <a:latin typeface="Malgun Gothic"/>
               </a:rPr>
-              <a:t>마케터(마케팅허브 심의의뢰 · 결과 조회)</a:t>
+              <a:t>구매담당자(전자구매포털 검증요청 · 결과 조회)</a:t>
             </a:r>
             <a:endParaRPr b="0" i="0" sz="1400" u="none" cap="none" strike="noStrike">
               <a:solidFill>
@@ -9183,7 +9183,7 @@
                 </a:solidFill>
                 <a:latin typeface="Malgun Gothic"/>
               </a:rPr>
-              <a:t>RA·관리자(BO ALB ➔ 통합웹 :3104)</a:t>
+              <a:t>QA·관리자(BO ALB ➔ 통합웹 :3104)</a:t>
             </a:r>
           </a:p>
         </p:txBody>
@@ -9372,7 +9372,7 @@
             <a:r>
               <a:rPr b="1" i="0" lang="en-US" sz="740" u="none" cap="none" strike="noStrike">
                 <a:solidFill>
-                  <a:srgbClr val="1E293B"/>
+                  <a:srgbClr val="0F2942"/>
                 </a:solidFill>
                 <a:latin typeface="Malgun Gothic"/>
                 <a:ea typeface="Malgun Gothic"/>
@@ -9463,7 +9463,7 @@
                 </a:solidFill>
                 <a:latin typeface="Malgun Gothic"/>
               </a:rPr>
-              <a:t>네이버 클로바 OCR(*.apigw.ntruss.com) / 패들OCR</a:t>
+              <a:t>엔터프라이즈 비전 OCR(ocr-api.hanbitglobal.internal) / 패들OCR</a:t>
             </a:r>
           </a:p>
         </p:txBody>
@@ -9593,7 +9593,7 @@
                 <a:cs typeface="Arial"/>
                 <a:sym typeface="Arial"/>
               </a:rPr>
-              <a:t>MKTHUB</a:t>
+              <a:t>SRMP</a:t>
             </a:r>
             <a:endParaRPr b="0" i="0" sz="1400" u="none" cap="none" strike="noStrike">
               <a:solidFill>
@@ -9652,14 +9652,14 @@
             <a:r>
               <a:rPr b="1" i="0" lang="en-US" sz="730" u="none" cap="none" strike="noStrike">
                 <a:solidFill>
-                  <a:srgbClr val="1E293B"/>
+                  <a:srgbClr val="0F2942"/>
                 </a:solidFill>
                 <a:latin typeface="Malgun Gothic"/>
                 <a:ea typeface="Malgun Gothic"/>
                 <a:cs typeface="Malgun Gothic"/>
                 <a:sym typeface="Malgun Gothic"/>
               </a:rPr>
-              <a:t>MarketingHub / ProductLab</a:t>
+              <a:t>SRM-Portal / PLM-Nexus</a:t>
             </a:r>
             <a:endParaRPr b="0" i="0" sz="1400" u="none" cap="none" strike="noStrike">
               <a:solidFill>
@@ -9718,11 +9718,11 @@
             <a:r>
               <a:rPr sz="610" b="0">
                 <a:solidFill>
-                  <a:srgbClr val="1E293B"/>
-                </a:solidFill>
-                <a:latin typeface="Malgun Gothic"/>
-              </a:rPr>
-              <a:t>마케팅허브 ➔ 대외연계 ALB(:443) 단독 오픈</a:t>
+                  <a:srgbClr val="0F2942"/>
+                </a:solidFill>
+                <a:latin typeface="Malgun Gothic"/>
+              </a:rPr>
+              <a:t>전자구매포털 ➔ 대외연계 ALB(:443) 단독 오픈</a:t>
             </a:r>
             <a:endParaRPr b="0" i="0" sz="1400" u="none" cap="none" strike="noStrike">
               <a:solidFill>
@@ -9743,7 +9743,7 @@
                 </a:solidFill>
                 <a:latin typeface="Malgun Gothic"/>
               </a:rPr>
-              <a:t>ProductLab: 매일 02:00 일배치 / [Option] 레몬</a:t>
+              <a:t>PLM-Nexus: 매일 02:00 일배치 / [Option] HB-Monitor</a:t>
             </a:r>
           </a:p>
         </p:txBody>
@@ -9869,7 +9869,7 @@
             <a:r>
               <a:rPr b="1" i="0" lang="en-US" sz="730" u="none" cap="none" strike="noStrike">
                 <a:solidFill>
-                  <a:srgbClr val="1E293B"/>
+                  <a:srgbClr val="0F2942"/>
                 </a:solidFill>
                 <a:latin typeface="Malgun Gothic"/>
                 <a:ea typeface="Malgun Gothic"/>
@@ -10722,11 +10722,11 @@
             <a:r>
               <a:rPr sz="700" b="1">
                 <a:solidFill>
-                  <a:srgbClr val="1E293B"/>
-                </a:solidFill>
-                <a:latin typeface="Malgun Gothic"/>
-              </a:rPr>
-              <a:t>syncguard-ai-bo-prv-alb</a:t>
+                  <a:srgbClr val="0F2942"/>
+                </a:solidFill>
+                <a:latin typeface="Malgun Gothic"/>
+              </a:rPr>
+              <a:t>syncflow-ai-bo-prv-alb</a:t>
             </a:r>
             <a:endParaRPr b="0" i="0" sz="1400" u="none" cap="none" strike="noStrike">
               <a:solidFill>
@@ -11652,7 +11652,7 @@
             <a:r>
               <a:rPr sz="540" b="1">
                 <a:solidFill>
-                  <a:srgbClr val="1E293B"/>
+                  <a:srgbClr val="0F2942"/>
                 </a:solidFill>
                 <a:latin typeface="Malgun Gothic"/>
               </a:rPr>
@@ -11677,7 +11677,7 @@
                 </a:solidFill>
                 <a:latin typeface="Malgun Gothic"/>
               </a:rPr>
-              <a:t>BO➔Agent 호출 · 상충탐지 · RA확정 · 백오피스</a:t>
+              <a:t>BO➔Agent 호출 · 상충탐지 · QA확정 · 백오피스</a:t>
             </a:r>
           </a:p>
         </p:txBody>
@@ -11991,11 +11991,11 @@
             <a:r>
               <a:rPr sz="540" b="1">
                 <a:solidFill>
-                  <a:srgbClr val="1E293B"/>
-                </a:solidFill>
-                <a:latin typeface="Malgun Gothic"/>
-              </a:rPr>
-              <a:t>마케팅허브 전용 ALB 인바운드 · 결과 웹훅 회신</a:t>
+                  <a:srgbClr val="0F2942"/>
+                </a:solidFill>
+                <a:latin typeface="Malgun Gothic"/>
+              </a:rPr>
+              <a:t>전자구매포털 전용 ALB 인바운드 · 결과 웹훅 회신</a:t>
             </a:r>
             <a:endParaRPr b="0" i="0" sz="1400" u="none" cap="none" strike="noStrike">
               <a:solidFill>
@@ -12138,7 +12138,7 @@
                 <a:cs typeface="Malgun Gothic"/>
                 <a:sym typeface="Malgun Gothic"/>
               </a:rPr>
-              <a:t>③ AI Agent (심의 에이전트)</a:t>
+              <a:t>③ AI Agent (검증 에이전트)</a:t>
             </a:r>
             <a:endParaRPr b="0" i="0" sz="1400" u="none" cap="none" strike="noStrike">
               <a:solidFill>
@@ -12330,11 +12330,11 @@
             <a:r>
               <a:rPr sz="540" b="1">
                 <a:solidFill>
-                  <a:srgbClr val="1E293B"/>
-                </a:solidFill>
-                <a:latin typeface="Malgun Gothic"/>
-              </a:rPr>
-              <a:t>OpenCV 피크프레임 1차 자동추출 + 웹 보정장면 분석</a:t>
+                  <a:srgbClr val="0F2942"/>
+                </a:solidFill>
+                <a:latin typeface="Malgun Gothic"/>
+              </a:rPr>
+              <a:t>OpenCV 도면스냅샷 1차 자동추출 + 웹 보정장면 분석</a:t>
             </a:r>
             <a:endParaRPr b="0" i="0" sz="1400" u="none" cap="none" strike="noStrike">
               <a:solidFill>
@@ -12355,7 +12355,7 @@
                 </a:solidFill>
                 <a:latin typeface="Malgun Gothic"/>
               </a:rPr>
-              <a:t>네이버/패들 OCR · 동시 4건 세마포어 + QUEUED</a:t>
+              <a:t>엔터프라이즈 멀티모달 OCR · 동시 4건 세마포어 + QUEUED</a:t>
             </a:r>
           </a:p>
         </p:txBody>
@@ -12669,14 +12669,14 @@
             <a:r>
               <a:rPr b="1" i="0" lang="en-US" sz="540" u="none" cap="none" strike="noStrike">
                 <a:solidFill>
-                  <a:srgbClr val="1E293B"/>
+                  <a:srgbClr val="0F2942"/>
                 </a:solidFill>
                 <a:latin typeface="Malgun Gothic"/>
                 <a:ea typeface="Malgun Gothic"/>
                 <a:cs typeface="Malgun Gothic"/>
                 <a:sym typeface="Malgun Gothic"/>
               </a:rPr>
-              <a:t>매일 02:00 ProductLab 전성분·실증</a:t>
+              <a:t>매일 02:00 PLM-Nexus 자재BOM·시험검증</a:t>
             </a:r>
             <a:endParaRPr b="0" i="0" sz="1400" u="none" cap="none" strike="noStrike">
               <a:solidFill>
@@ -12716,7 +12716,7 @@
                 <a:cs typeface="Malgun Gothic"/>
                 <a:sym typeface="Malgun Gothic"/>
               </a:rPr>
-              <a:t>02:30 KT레몬 · 법령 Diff 벡터화</a:t>
+              <a:t>02:30 HB-Monitor · 법령 Diff 벡터화</a:t>
             </a:r>
             <a:endParaRPr b="0" i="0" sz="1400" u="none" cap="none" strike="noStrike">
               <a:solidFill>
@@ -13052,7 +13052,7 @@
             <a:r>
               <a:rPr b="1" i="0" lang="en-US" sz="740" u="none" cap="none" strike="noStrike">
                 <a:solidFill>
-                  <a:srgbClr val="1E293B"/>
+                  <a:srgbClr val="0F2942"/>
                 </a:solidFill>
                 <a:latin typeface="Malgun Gothic"/>
                 <a:ea typeface="Malgun Gothic"/>
@@ -13125,7 +13125,7 @@
                 <a:cs typeface="Malgun Gothic"/>
                 <a:sym typeface="Malgun Gothic"/>
               </a:rPr>
-              <a:t>hb_syncguard_ai DB  ·  :5432</a:t>
+              <a:t>hb_syncflow_ai DB  ·  :5432</a:t>
             </a:r>
             <a:endParaRPr b="0" i="0" sz="1400" u="none" cap="none" strike="noStrike">
               <a:solidFill>
@@ -13184,14 +13184,14 @@
             <a:r>
               <a:rPr b="0" i="0" lang="en-US" sz="630" u="none" cap="none" strike="noStrike">
                 <a:solidFill>
-                  <a:srgbClr val="1E293B"/>
+                  <a:srgbClr val="0F2942"/>
                 </a:solidFill>
                 <a:latin typeface="Malgun Gothic"/>
                 <a:ea typeface="Malgun Gothic"/>
                 <a:cs typeface="Malgun Gothic"/>
                 <a:sym typeface="Malgun Gothic"/>
               </a:rPr>
-              <a:t>• 심의 마스터 · 대기열(QUEUED/FAILED) · 과거 상충 탐지</a:t>
+              <a:t>• 검증 마스터 · 대기열(QUEUED/FAILED) · 과거 상충 탐지</a:t>
             </a:r>
             <a:endParaRPr b="0" i="0" sz="1400" u="none" cap="none" strike="noStrike">
               <a:solidFill>
@@ -13224,7 +13224,7 @@
             <a:r>
               <a:rPr b="0" i="0" lang="en-US" sz="630" u="none" cap="none" strike="noStrike">
                 <a:solidFill>
-                  <a:srgbClr val="1E293B"/>
+                  <a:srgbClr val="0F2942"/>
                 </a:solidFill>
                 <a:latin typeface="Malgun Gothic"/>
                 <a:ea typeface="Malgun Gothic"/>
@@ -13264,14 +13264,14 @@
             <a:r>
               <a:rPr b="0" i="0" lang="en-US" sz="630" u="none" cap="none" strike="noStrike">
                 <a:solidFill>
-                  <a:srgbClr val="1E293B"/>
+                  <a:srgbClr val="0F2942"/>
                 </a:solidFill>
                 <a:latin typeface="Malgun Gothic"/>
                 <a:ea typeface="Malgun Gothic"/>
                 <a:cs typeface="Malgun Gothic"/>
                 <a:sym typeface="Malgun Gothic"/>
               </a:rPr>
-              <a:t>• 금지/주의 표현사전 · ProductLab 전성분/실증 캐시</a:t>
+              <a:t>• 금지/주의 표현사전 · PLM-Nexus 자재BOM/시험검증 캐시</a:t>
             </a:r>
             <a:endParaRPr b="0" i="0" sz="1400" u="none" cap="none" strike="noStrike">
               <a:solidFill>
@@ -13472,14 +13472,14 @@
             <a:r>
               <a:rPr b="0" i="0" lang="en-US" sz="610" u="none" cap="none" strike="noStrike">
                 <a:solidFill>
-                  <a:srgbClr val="1E293B"/>
+                  <a:srgbClr val="0F2942"/>
                 </a:solidFill>
                 <a:latin typeface="Malgun Gothic"/>
                 <a:ea typeface="Malgun Gothic"/>
                 <a:cs typeface="Malgun Gothic"/>
                 <a:sym typeface="Malgun Gothic"/>
               </a:rPr>
-              <a:t>규제 조항 &amp; 기술원 실증보고서 벡터 색인 (1536d)</a:t>
+              <a:t>규제 조항 &amp; 기술원 시험검증보고서 벡터 색인 (1536d)</a:t>
             </a:r>
             <a:endParaRPr b="0" i="0" sz="1400" u="none" cap="none" strike="noStrike">
               <a:solidFill>
@@ -13654,7 +13654,7 @@
             <a:r>
               <a:rPr b="1" i="0" lang="en-US" sz="730" u="none" cap="none" strike="noStrike">
                 <a:solidFill>
-                  <a:srgbClr val="1E293B"/>
+                  <a:srgbClr val="0F2942"/>
                 </a:solidFill>
                 <a:latin typeface="Malgun Gothic"/>
                 <a:ea typeface="Malgun Gothic"/>
@@ -13745,7 +13745,7 @@
                 </a:solidFill>
                 <a:latin typeface="Malgun Gothic"/>
               </a:rPr>
-              <a:t>300MB 시안·영상 · AI 추출 및 웹 보정 장면 · 리포트</a:t>
+              <a:t>300MB 계약·도서·영상 · AI 추출 및 웹 보정 장면 · 리포트</a:t>
             </a:r>
           </a:p>
         </p:txBody>
@@ -14309,7 +14309,7 @@
                 </a:solidFill>
                 <a:latin typeface="Malgun Gothic"/>
               </a:rPr>
-              <a:t>네이버OCR(*.apigw.ntruss.com) · LLM · 마케팅허브 방화벽 오픈</a:t>
+              <a:t>비전OCR(ocr-api.hanbitglobal.internal) · LLM · 전자구매포털 방화벽 오픈</a:t>
             </a:r>
             <a:endParaRPr b="0" i="0" sz="1400" u="none" cap="none" strike="noStrike">
               <a:solidFill>
@@ -14519,7 +14519,7 @@
             <a:r>
               <a:rPr b="1" i="0" lang="en-US" sz="730" u="none" cap="none" strike="noStrike">
                 <a:solidFill>
-                  <a:srgbClr val="1E293B"/>
+                  <a:srgbClr val="0F2942"/>
                 </a:solidFill>
                 <a:latin typeface="Malgun Gothic"/>
                 <a:ea typeface="Malgun Gothic"/>
@@ -14736,7 +14736,7 @@
             <a:r>
               <a:rPr b="1" i="0" lang="en-US" sz="730" u="none" cap="none" strike="noStrike">
                 <a:solidFill>
-                  <a:srgbClr val="1E293B"/>
+                  <a:srgbClr val="0F2942"/>
                 </a:solidFill>
                 <a:latin typeface="Malgun Gothic"/>
                 <a:ea typeface="Malgun Gothic"/>
@@ -15013,7 +15013,7 @@
             <a:r>
               <a:rPr b="1" i="0" lang="en-US" sz="700" u="none" cap="none" strike="noStrike">
                 <a:solidFill>
-                  <a:srgbClr val="1E293B"/>
+                  <a:srgbClr val="0F2942"/>
                 </a:solidFill>
                 <a:latin typeface="Malgun Gothic"/>
                 <a:ea typeface="Malgun Gothic"/>
@@ -15081,7 +15081,7 @@
             <a:r>
               <a:rPr b="1" i="0" lang="en-US" sz="700" u="none" cap="none" strike="noStrike">
                 <a:solidFill>
-                  <a:srgbClr val="1E293B"/>
+                  <a:srgbClr val="0F2942"/>
                 </a:solidFill>
                 <a:latin typeface="Malgun Gothic"/>
                 <a:ea typeface="Malgun Gothic"/>
@@ -15149,7 +15149,7 @@
             <a:r>
               <a:rPr b="1" i="0" lang="en-US" sz="690" u="none" cap="none" strike="noStrike">
                 <a:solidFill>
-                  <a:srgbClr val="1E293B"/>
+                  <a:srgbClr val="0F2942"/>
                 </a:solidFill>
                 <a:latin typeface="Malgun Gothic"/>
                 <a:ea typeface="Malgun Gothic"/>
@@ -15217,7 +15217,7 @@
             <a:r>
               <a:rPr sz="680" b="1">
                 <a:solidFill>
-                  <a:srgbClr val="1E293B"/>
+                  <a:srgbClr val="0F2942"/>
                 </a:solidFill>
                 <a:latin typeface="Malgun Gothic"/>
               </a:rPr>
@@ -15353,11 +15353,11 @@
             <a:r>
               <a:rPr sz="700" b="1">
                 <a:solidFill>
-                  <a:srgbClr val="1E293B"/>
-                </a:solidFill>
-                <a:latin typeface="Malgun Gothic"/>
-              </a:rPr>
-              <a:t>syncguard-ai-api-prv-alb</a:t>
+                  <a:srgbClr val="0F2942"/>
+                </a:solidFill>
+                <a:latin typeface="Malgun Gothic"/>
+              </a:rPr>
+              <a:t>syncflow-ai-api-prv-alb</a:t>
             </a:r>
             <a:endParaRPr b="0" i="0" sz="1400" u="none" cap="none" strike="noStrike">
               <a:solidFill>
@@ -15420,7 +15420,7 @@
                 </a:solidFill>
                 <a:latin typeface="Malgun Gothic"/>
               </a:rPr>
-              <a:t>[대외연계 ALB] 마케팅허브만 오픈(:443)</a:t>
+              <a:t>[대외연계 ALB] 전자구매포털만 오픈(:443)</a:t>
             </a:r>
             <a:endParaRPr b="0" i="0" sz="1400" u="none" cap="none" strike="noStrike">
               <a:solidFill>
@@ -15803,7 +15803,7 @@
                 <a:cs typeface="Malgun Gothic"/>
                 <a:sym typeface="Malgun Gothic"/>
               </a:rPr>
-              <a:t>Presentation Layer (통합 웹 콘솔 &amp; 마케팅허브 결과 연동)</a:t>
+              <a:t>Presentation Layer (통합 웹 콘솔 &amp; 전자구매포털 결과 연동)</a:t>
             </a:r>
             <a:endParaRPr b="0" i="0" sz="1400" u="none" cap="none" strike="noStrike">
               <a:solidFill>
@@ -15843,7 +15843,7 @@
                 <a:cs typeface="Malgun Gothic"/>
                 <a:sym typeface="Malgun Gothic"/>
               </a:rPr>
-              <a:t>SyncGuard AI 통합 웹(Client/fe :3104) · MarketingHub 결과 표출(HTML/JSON) · Canvas/Video Viewer</a:t>
+              <a:t>SyncFlow AI 통합 웹(Client/fe :3104) · SRM-Portal 결과 표출(HTML/JSON) · Canvas/Video Viewer</a:t>
             </a:r>
             <a:endParaRPr b="0" i="0" sz="1400" u="none" cap="none" strike="noStrike">
               <a:solidFill>
@@ -15914,7 +15914,7 @@
                 </a:solidFill>
                 <a:latin typeface="Malgun Gothic"/>
               </a:rPr>
-              <a:t>통합 심의 워크스페이스 (Client/fe :3104)</a:t>
+              <a:t>통합 검증 워크스페이스 (Client/fe :3104)</a:t>
             </a:r>
             <a:endParaRPr b="0" i="0" sz="1400" u="none" cap="none" strike="noStrike">
               <a:solidFill>
@@ -15935,7 +15935,7 @@
                 </a:solidFill>
                 <a:latin typeface="Malgun Gothic"/>
               </a:rPr>
-              <a:t>AI 1차 피크프레임 확인 + 웹 영상 재생·특정화면 멈춤 장면 추가/편집/삭제 보정, 상충 비교</a:t>
+              <a:t>AI 1차 도면스냅샷 확인 + 웹 영상 재생·특정화면 멈춤 장면 추가/편집/삭제 보정, 상충 비교</a:t>
             </a:r>
           </a:p>
         </p:txBody>
@@ -16040,7 +16040,7 @@
                 <a:cs typeface="Malgun Gothic"/>
                 <a:sym typeface="Malgun Gothic"/>
               </a:rPr>
-              <a:t>캔버스 2D 슬라이드·영상 피크프레임 BndBox 하이라이트, 대체문구 채택, 심의 결과서(HTML/PDF/Excel) 출력 및 마케팅허브 전달</a:t>
+              <a:t>캔버스 2D 슬라이드·영상 도면스냅샷 BndBox 하이라이트, 표준수정조항 채택, 검증 결과서(HTML/PDF/Excel) 출력 및 전자구매포털 전달</a:t>
             </a:r>
             <a:endParaRPr b="0" i="0" sz="1400" u="none" cap="none" strike="noStrike">
               <a:solidFill>
@@ -16114,7 +16114,7 @@
                 <a:cs typeface="Malgun Gothic"/>
                 <a:sym typeface="Malgun Gothic"/>
               </a:rPr>
-              <a:t>프로덕트랩(ProductLab) 실증 뷰어</a:t>
+              <a:t>피엘엠넥서스(PLM-Nexus) 시험검증 뷰어</a:t>
             </a:r>
             <a:endParaRPr b="0" i="0" sz="1400" u="none" cap="none" strike="noStrike">
               <a:solidFill>
@@ -16154,7 +16154,7 @@
                 <a:cs typeface="Malgun Gothic"/>
                 <a:sym typeface="Malgun Gothic"/>
               </a:rPr>
-              <a:t>R&amp;I 원료 배합, 세포 효능, 기술원 인체적용시험·설문(HUT) 완료 보고서 대조 및 연구원 실증자료 업로드 요청 메일 연동</a:t>
+              <a:t>선행연구소 원소재 조성, 배상한도 성능규격, 기술원 공인신뢰성시험·설문(HUT) 완료 보고서 대조 및 연구원 시험성적서 업로드 요청 메일 연동</a:t>
             </a:r>
             <a:endParaRPr b="0" i="0" sz="1400" u="none" cap="none" strike="noStrike">
               <a:solidFill>
@@ -16268,7 +16268,7 @@
                 <a:cs typeface="Malgun Gothic"/>
                 <a:sym typeface="Malgun Gothic"/>
               </a:rPr>
-              <a:t>사내 IAM 권한 인가(validateBoAdminPermission), 식약처 규제문서 마크다운 계층 청킹·RAG 관리, 표현사전·프롬프트·골든셋·감사원장</a:t>
+              <a:t>사내 IAM 권한 인가(validateBoAdminPermission), 공정위·표준원 규제문서 마크다운 계층 청킹·RAG 관리, 표현사전·프롬프트·골든셋·감사원장</a:t>
             </a:r>
             <a:endParaRPr b="0" i="0" sz="1400" u="none" cap="none" strike="noStrike">
               <a:solidFill>
@@ -16537,7 +16537,7 @@
                 </a:solidFill>
                 <a:latin typeface="Malgun Gothic"/>
               </a:rPr>
-              <a:t>BO ALB(사용자대역 오픈 ➔ :3104/:18080) 및 대외연계 ALB(마케팅허브만 오픈 ➔ :18085) 분리</a:t>
+              <a:t>BO ALB(사용자대역 오픈 ➔ :3104/:18080) 및 대외연계 ALB(전자구매포털만 오픈 ➔ :18085) 분리</a:t>
             </a:r>
           </a:p>
         </p:txBody>
@@ -16642,7 +16642,7 @@
                 <a:cs typeface="Malgun Gothic"/>
                 <a:sym typeface="Malgun Gothic"/>
               </a:rPr>
-              <a:t>마케터는 마케팅허브에서 의뢰·결과 조회, RA 담당자·시스템 관리자는 사내 IAM 역할 인가(validateBoAdminPermission) 기반 통합 콘솔 접근</a:t>
+              <a:t>구매담당자는 전자구매포털에서 의뢰·결과 조회, 법무·QA 담당자·시스템 관리자는 사내 IAM 역할 인가(validateBoAdminPermission) 기반 통합 콘솔 접근</a:t>
             </a:r>
             <a:endParaRPr b="0" i="0" sz="1400" u="none" cap="none" strike="noStrike">
               <a:solidFill>
@@ -17222,7 +17222,7 @@
                 </a:solidFill>
                 <a:latin typeface="Malgun Gothic"/>
               </a:rPr>
-              <a:t>OpenCV 피크프레임 1차 자동추출 + 웹 보정 장면 재분석, 네이버/패들 OCR, 동시 4건 큐 워커</a:t>
+              <a:t>OpenCV 도면스냅샷 1차 자동추출 + 웹 보정 장면 재분석, 엔터프라이즈 멀티모달 OCR, 동시 4건 큐 워커</a:t>
             </a:r>
           </a:p>
         </p:txBody>
@@ -17305,7 +17305,7 @@
                 </a:solidFill>
                 <a:latin typeface="Malgun Gothic"/>
               </a:rPr>
-              <a:t>웹 영상 보정 장면·수동 재실행 시 EKS Service로 AI Agent 호출, 상충탐지, RA 확정·백오피스</a:t>
+              <a:t>웹 영상 보정 장면·수동 재실행 시 EKS Service로 AI Agent 호출, 상충탐지, QA 확정·백오피스</a:t>
             </a:r>
           </a:p>
         </p:txBody>
@@ -17410,7 +17410,7 @@
                 <a:cs typeface="Malgun Gothic"/>
                 <a:sym typeface="Malgun Gothic"/>
               </a:rPr>
-              <a:t>매일 새벽 02:00 ProductLab 전성분·실증 일배치(ProductLabSyncBatchJob), 02:30 KT레몬 배치, 01:30 법령 Diff 배치</a:t>
+              <a:t>매일 새벽 02:00 PLM-Nexus 자재BOM·시험검증 일배치(PlmNexusSyncBatchJob), 02:30 HB-Monitor 배치, 01:30 법령 Diff 배치</a:t>
             </a:r>
             <a:endParaRPr b="0" i="0" sz="1400" u="none" cap="none" strike="noStrike">
               <a:solidFill>
@@ -17661,7 +17661,7 @@
                 <a:cs typeface="Malgun Gothic"/>
                 <a:sym typeface="Malgun Gothic"/>
               </a:rPr>
-              <a:t>5대 규제 룰 &amp; 전성분 RDB</a:t>
+              <a:t>5대 규제 룰 &amp; 자재BOM RDB</a:t>
             </a:r>
             <a:endParaRPr b="0" i="0" sz="1400" u="none" cap="none" strike="noStrike">
               <a:solidFill>
@@ -17701,7 +17701,7 @@
                 <a:cs typeface="Malgun Gothic"/>
                 <a:sym typeface="Malgun Gothic"/>
               </a:rPr>
-              <a:t>Aho-Corasick 금지·주의 사전 스캔 + 마케팅허브 RDB 전성분·배합한도(%)·금지원료 결정론적 검증</a:t>
+              <a:t>Aho-Corasick 금지·주의 사전 스캔 + 전자구매포털 RDB 자재BOM·유해물질한도(%)·금지원소재 결정론적 검증</a:t>
             </a:r>
             <a:endParaRPr b="0" i="0" sz="1400" u="none" cap="none" strike="noStrike">
               <a:solidFill>
@@ -17815,7 +17815,7 @@
                 <a:cs typeface="Malgun Gothic"/>
                 <a:sym typeface="Malgun Gothic"/>
               </a:rPr>
-              <a:t>룰 엔진이 확정한 의약품 오인·금지어(검출률 95% 목표)는 LLM이 임의 하향 조정 불가 강제</a:t>
+              <a:t>룰 엔진이 확정한 불공정 독소조항·독소조항(검출률 95% 목표)는 LLM이 임의 하향 조정 불가 강제</a:t>
             </a:r>
             <a:endParaRPr b="0" i="0" sz="1400" u="none" cap="none" strike="noStrike">
               <a:solidFill>
@@ -17929,7 +17929,7 @@
                 <a:cs typeface="Malgun Gothic"/>
                 <a:sym typeface="Malgun Gothic"/>
               </a:rPr>
-              <a:t>1단계: 금지 표현 검출 ➔ 2단계: 문맥/주의/각주 적정성 판정 ➔ 3단계: 실증 자료 부합성 분석</a:t>
+              <a:t>1단계: 금지 표현 검출 ➔ 2단계: 문맥/주의/특약주석 적정성 판정 ➔ 3단계: 시험성적서 부합성 분석</a:t>
             </a:r>
             <a:endParaRPr b="0" i="0" sz="1400" u="none" cap="none" strike="noStrike">
               <a:solidFill>
@@ -18003,7 +18003,7 @@
                 <a:cs typeface="Malgun Gothic"/>
                 <a:sym typeface="Malgun Gothic"/>
               </a:rPr>
-              <a:t>국·영문 심의 &amp; 대체문구</a:t>
+              <a:t>국·영문 검증 &amp; 표준수정조항</a:t>
             </a:r>
             <a:endParaRPr b="0" i="0" sz="1400" u="none" cap="none" strike="noStrike">
               <a:solidFill>
@@ -18043,7 +18043,7 @@
                 <a:cs typeface="Malgun Gothic"/>
                 <a:sym typeface="Malgun Gothic"/>
               </a:rPr>
-              <a:t>영문 혼용 문구 한국어 번역 후 국내 표시·광고 공정화법 대조, 식약처 가이드라인 기반 안전 대체 표현 생성</a:t>
+              <a:t>영문 혼용 조항 한국어 번역 후 국내 하도급거래 공정화법 대조, 공정위·표준원 가이드라인 기반 안전 대체 표현 생성</a:t>
             </a:r>
             <a:endParaRPr b="0" i="0" sz="1400" u="none" cap="none" strike="noStrike">
               <a:solidFill>
@@ -18294,7 +18294,7 @@
                 <a:cs typeface="Malgun Gothic"/>
                 <a:sym typeface="Malgun Gothic"/>
               </a:rPr>
-              <a:t>식약처 법령 계층형 청킹 &amp; 과거 상충 탐지</a:t>
+              <a:t>공정위·표준원 법령 계층형 청킹 &amp; 과거 상충 탐지</a:t>
             </a:r>
             <a:endParaRPr b="0" i="0" sz="1400" u="none" cap="none" strike="noStrike">
               <a:solidFill>
@@ -18334,7 +18334,7 @@
                 <a:cs typeface="Malgun Gothic"/>
                 <a:sym typeface="Malgun Gothic"/>
               </a:rPr>
-              <a:t>표시·광고 공정화법·가이드라인 마크다운 계층형(Parent-Child) 청킹(1536d) 및 과거 확정 심의 이력(pg_trgm) 등급 상충 자동 탐지</a:t>
+              <a:t>하도급거래 공정화법·가이드라인 마크다운 계층형(Parent-Child) 청킹(1536d) 및 과거 확정 검증 이력(pg_trgm) 등급 상충 자동 탐지</a:t>
             </a:r>
             <a:endParaRPr b="0" i="0" sz="1400" u="none" cap="none" strike="noStrike">
               <a:solidFill>
@@ -18408,7 +18408,7 @@
                 <a:cs typeface="Malgun Gothic"/>
                 <a:sym typeface="Malgun Gothic"/>
               </a:rPr>
-              <a:t>기술원 실증보고서 매칭</a:t>
+              <a:t>기술원 시험검증보고서 매칭</a:t>
             </a:r>
             <a:endParaRPr b="0" i="0" sz="1400" u="none" cap="none" strike="noStrike">
               <a:solidFill>
@@ -18448,7 +18448,7 @@
                 <a:cs typeface="Malgun Gothic"/>
                 <a:sym typeface="Malgun Gothic"/>
               </a:rPr>
-              <a:t>ProductLab 인체적용시험·설문 보고서 구절 매칭 (LLM 직접 파싱 vs [Option] KT레몬 벡터매칭 비교)</a:t>
+              <a:t>PLM-Nexus 공인신뢰성시험·설문 보고서 구절 매칭 (LLM 직접 파싱 vs [Option] HB-Monitor 벡터매칭 비교)</a:t>
             </a:r>
             <a:endParaRPr b="0" i="0" sz="1400" u="none" cap="none" strike="noStrike">
               <a:solidFill>
@@ -18853,7 +18853,7 @@
                 <a:cs typeface="Malgun Gothic"/>
                 <a:sym typeface="Malgun Gothic"/>
               </a:rPr>
-              <a:t>PostgreSQL 16 (pgvector 통합) · AWS S3 · MarketingHub · ProductLab · [Option] KT레몬</a:t>
+              <a:t>PostgreSQL 16 (pgvector 통합) · AWS S3 · SRM-Portal · PLM-Nexus · [Option] HB-Monitor</a:t>
             </a:r>
             <a:endParaRPr b="0" i="0" sz="1400" u="none" cap="none" strike="noStrike">
               <a:solidFill>
@@ -18967,7 +18967,7 @@
                 <a:cs typeface="Malgun Gothic"/>
                 <a:sym typeface="Malgun Gothic"/>
               </a:rPr>
-              <a:t>hb_syncguard_ai DB(:5432), 25개 정규 테이블 + 요약 뷰, 규제·실증 1536d 벡터 색인, 불변 감사 원장(WORM)</a:t>
+              <a:t>hb_syncflow_ai DB(:5432), 25개 정규 테이블 + 요약 뷰, 규제·시험검증 1536d 벡터 색인, 불변 감사 원장(WORM)</a:t>
             </a:r>
             <a:endParaRPr b="0" i="0" sz="1400" u="none" cap="none" strike="noStrike">
               <a:solidFill>
@@ -19059,7 +19059,7 @@
                 </a:solidFill>
                 <a:latin typeface="Malgun Gothic"/>
               </a:rPr>
-              <a:t>업로드 시 Intelligent-Tiering 자동 적용(보관비용 관리) · 시안/영상 원본 및 캡처 장면 보관</a:t>
+              <a:t>업로드 시 Intelligent-Tiering 자동 적용(보관비용 관리) · 계약·도서/영상 원본 및 도면 스냅샷 보관</a:t>
             </a:r>
           </a:p>
         </p:txBody>
@@ -19124,7 +19124,7 @@
                 <a:cs typeface="Malgun Gothic"/>
                 <a:sym typeface="Malgun Gothic"/>
               </a:rPr>
-              <a:t>마케팅허브(MarketingHub) 양방향 인터페이스</a:t>
+              <a:t>전자구매포털(SRM-Portal) 양방향 인터페이스</a:t>
             </a:r>
             <a:endParaRPr b="0" i="0" sz="1400" u="none" cap="none" strike="noStrike">
               <a:solidFill>
@@ -19164,7 +19164,7 @@
                 <a:cs typeface="Malgun Gothic"/>
                 <a:sym typeface="Malgun Gothic"/>
               </a:rPr>
-              <a:t>심의 의뢰 메타·파일 수신 API, 전성분/배합한도 RDB 조회, RA 확정 결과(HTML/JSON/PDF) 웹훅 회신 및 마케팅허브 표출</a:t>
+              <a:t>검증 요청 메타·파일 수신 API, 자재BOM/유해물질한도 RDB 조회, QA 확정 결과(HTML/JSON/PDF) 웹훅 회신 및 전자구매포털 표출</a:t>
             </a:r>
             <a:endParaRPr b="0" i="0" sz="1400" u="none" cap="none" strike="noStrike">
               <a:solidFill>
@@ -19238,7 +19238,7 @@
                 <a:cs typeface="Malgun Gothic"/>
                 <a:sym typeface="Malgun Gothic"/>
               </a:rPr>
-              <a:t>프로덕트랩 배치 &amp; [Option] KT레몬</a:t>
+              <a:t>피엘엠넥서스 배치 &amp; [Option] HB-Monitor</a:t>
             </a:r>
             <a:endParaRPr b="0" i="0" sz="1400" u="none" cap="none" strike="noStrike">
               <a:solidFill>
@@ -19278,7 +19278,7 @@
                 <a:cs typeface="Malgun Gothic"/>
                 <a:sym typeface="Malgun Gothic"/>
               </a:rPr>
-              <a:t>ProductLab 원료·세포효능·시험보고서 일일 배치 수집 · [Option] KT레몬 보고서 벡터 연동</a:t>
+              <a:t>PLM-Nexus 원소재·배상한도성능규격·시험보고서 일일 배치 수집 · [Option] HB-Monitor 보고서 벡터 연동</a:t>
             </a:r>
             <a:endParaRPr b="0" i="0" sz="1400" u="none" cap="none" strike="noStrike">
               <a:solidFill>
@@ -19369,7 +19369,7 @@
                 <a:cs typeface="Malgun Gothic"/>
                 <a:sym typeface="Malgun Gothic"/>
               </a:rPr>
-              <a:t>3. AI 심의 및 하이브리드 RAG 파이프라인 구성도 (End-to-End Decision Flow)</a:t>
+              <a:t>3. AI 검증 및 하이브리드 RAG 파이프라인 구성도 (End-to-End Decision Flow)</a:t>
             </a:r>
             <a:endParaRPr b="0" i="0" sz="1400" u="none" cap="none" strike="noStrike">
               <a:solidFill>
@@ -19432,7 +19432,7 @@
                 </a:solidFill>
                 <a:latin typeface="Malgun Gothic"/>
               </a:rPr>
-              <a:t>대외연계 ALB 접수·S3(Intelligent-Tiering) 저장 ➔ 1차 AI 피크프레임 자동추출 + 2차 웹 영상 재생·장면 보정(BO➔Agent 호출) ➔ 4건 큐·RAG·LLM ➔ 마케팅허브 회신</a:t>
+              <a:t>대외연계 ALB 접수·S3(Intelligent-Tiering) 저장 ➔ 1차 AI 도면스냅샷 자동추출 + 2차 웹 영상 재생·장면 보정(BO➔Agent 호출) ➔ 4건 큐·RAG·LLM ➔ 전자구매포털 회신</a:t>
             </a:r>
             <a:endParaRPr b="0" i="0" sz="1400" u="none" cap="none" strike="noStrike">
               <a:solidFill>
@@ -19703,7 +19703,7 @@
                 </a:solidFill>
                 <a:latin typeface="Malgun Gothic"/>
               </a:rPr>
-              <a:t>마케팅허브 전용 ALB(:18085) 의뢰 수신 및 시안·영상(300MB) S3(Intelligent-Tiering 자동적용) 저장</a:t>
+              <a:t>전자구매포털 전용 ALB(:18085) 의뢰 수신 및 계약·도서·영상(300MB) S3(Intelligent-Tiering 자동적용) 저장</a:t>
             </a:r>
           </a:p>
         </p:txBody>
@@ -19833,7 +19833,7 @@
                 </a:solidFill>
                 <a:latin typeface="Malgun Gothic"/>
               </a:rPr>
-              <a:t>1차 AI 피크프레임 &amp; 2차 웹 장면 보정</a:t>
+              <a:t>1차 AI 도면스냅샷 &amp; 2차 웹 장면 보정</a:t>
             </a:r>
             <a:endParaRPr b="0" i="0" sz="1400" u="none" cap="none" strike="noStrike">
               <a:solidFill>
@@ -19854,7 +19854,7 @@
                 </a:solidFill>
                 <a:latin typeface="Malgun Gothic"/>
               </a:rPr>
-              <a:t>AI Agent가 OpenCV로 피크프레임 1차 자동추출 ➔ 웹 화면에서 영상 재생·특정화면 멈춤 장면 추가/편집/삭제</a:t>
+              <a:t>AI Agent가 OpenCV로 도면스냅샷 1차 자동추출 ➔ 웹 화면에서 영상 재생·특정화면 멈춤 장면 추가/편집/삭제</a:t>
             </a:r>
           </a:p>
         </p:txBody>
@@ -20095,7 +20095,7 @@
                 <a:cs typeface="Malgun Gothic"/>
                 <a:sym typeface="Malgun Gothic"/>
               </a:rPr>
-              <a:t>1차 규제 룰 &amp; 전성분 대조</a:t>
+              <a:t>1차 규제 룰 &amp; 자재BOM 대조</a:t>
             </a:r>
             <a:endParaRPr b="0" i="0" sz="1400" u="none" cap="none" strike="noStrike">
               <a:solidFill>
@@ -20171,7 +20171,7 @@
                 <a:cs typeface="Malgun Gothic"/>
                 <a:sym typeface="Malgun Gothic"/>
               </a:rPr>
-              <a:t>식약처 룰셋 &amp; 마케팅허브 RDB</a:t>
+              <a:t>공정위·표준원 룰셋 &amp; 전자구매포털 RDB</a:t>
             </a:r>
             <a:endParaRPr b="0" i="0" sz="1400" u="none" cap="none" strike="noStrike">
               <a:solidFill>
@@ -20211,7 +20211,7 @@
                 <a:cs typeface="Malgun Gothic"/>
                 <a:sym typeface="Malgun Gothic"/>
               </a:rPr>
-              <a:t>표현사전(금지/주의/허용) 스캔 + 마케팅허브 RDB 전성분·배합한도(%)·금지원료 대조</a:t>
+              <a:t>표현사전(금지/주의/허용) 스캔 + 전자구매포털 RDB 자재BOM·유해물질한도(%)·금지원소재 대조</a:t>
             </a:r>
             <a:endParaRPr b="0" i="0" sz="1400" u="none" cap="none" strike="noStrike">
               <a:solidFill>
@@ -20393,7 +20393,7 @@
                 <a:cs typeface="Malgun Gothic"/>
                 <a:sym typeface="Malgun Gothic"/>
               </a:rPr>
-              <a:t>의약품 오인·금지표현(검출률 95% KPI) 확정 시 AI 위험도 임의 하향 불가 강제</a:t>
+              <a:t>불공정 독소조항·금지표현(검출률 95% KPI) 확정 시 AI 위험도 임의 하향 불가 강제</a:t>
             </a:r>
             <a:endParaRPr b="0" i="0" sz="1400" u="none" cap="none" strike="noStrike">
               <a:solidFill>
@@ -20646,7 +20646,7 @@
                 <a:cs typeface="Malgun Gothic"/>
                 <a:sym typeface="Malgun Gothic"/>
               </a:rPr>
-              <a:t>2차 하이브리드 RAG·실증</a:t>
+              <a:t>2차 하이브리드 RAG·시험검증</a:t>
             </a:r>
             <a:endParaRPr b="0" i="0" sz="1400" u="none" cap="none" strike="noStrike">
               <a:solidFill>
@@ -20722,7 +20722,7 @@
                 <a:cs typeface="Malgun Gothic"/>
                 <a:sym typeface="Malgun Gothic"/>
               </a:rPr>
-              <a:t>식약처 법령 &amp; ProductLab</a:t>
+              <a:t>공정위·표준원 법령 &amp; PLM-Nexus</a:t>
             </a:r>
             <a:endParaRPr b="0" i="0" sz="1400" u="none" cap="none" strike="noStrike">
               <a:solidFill>
@@ -20762,7 +20762,7 @@
                 <a:cs typeface="Malgun Gothic"/>
                 <a:sym typeface="Malgun Gothic"/>
               </a:rPr>
-              <a:t>법령·해설서 pgvector 검색 + ProductLab 기술원 인체적용시험·설문 보고서 매칭</a:t>
+              <a:t>법령·해설서 pgvector 검색 + PLM-Nexus 기술원 공인신뢰성시험·설문 보고서 매칭</a:t>
             </a:r>
             <a:endParaRPr b="0" i="0" sz="1400" u="none" cap="none" strike="noStrike">
               <a:solidFill>
@@ -20904,7 +20904,7 @@
                 <a:cs typeface="Malgun Gothic"/>
                 <a:sym typeface="Malgun Gothic"/>
               </a:rPr>
-              <a:t>실증 대조 &amp; 과거 이력 상충 탐지</a:t>
+              <a:t>시험검증 대조 &amp; 과거 이력 상충 탐지</a:t>
             </a:r>
             <a:endParaRPr b="0" i="0" sz="1400" u="none" cap="none" strike="noStrike">
               <a:solidFill>
@@ -20944,7 +20944,7 @@
                 <a:cs typeface="Malgun Gothic"/>
                 <a:sym typeface="Malgun Gothic"/>
               </a:rPr>
-              <a:t>시험성적서 수치 대조 + 과거 확정 심의 이력(pg_trgm) 대조를 통한 브랜드/심의자 간 등급 상충(Conflict) 자동 경고</a:t>
+              <a:t>시험성적서 수치 대조 + 과거 확정 검증 이력(pg_trgm) 대조를 통한 사업본부/검증자 간 등급 상충(Conflict) 자동 경고</a:t>
             </a:r>
             <a:endParaRPr b="0" i="0" sz="1400" u="none" cap="none" strike="noStrike">
               <a:solidFill>
@@ -21020,7 +21020,7 @@
                 <a:cs typeface="Malgun Gothic"/>
                 <a:sym typeface="Malgun Gothic"/>
               </a:rPr>
-              <a:t>법령·실증·과거이력 바인딩</a:t>
+              <a:t>법령·시험검증·과거이력 바인딩</a:t>
             </a:r>
             <a:endParaRPr b="0" i="0" sz="1400" u="none" cap="none" strike="noStrike">
               <a:solidFill>
@@ -21495,7 +21495,7 @@
                 <a:cs typeface="Malgun Gothic"/>
                 <a:sym typeface="Malgun Gothic"/>
               </a:rPr>
-              <a:t>문장·장면별 위험도(4대 레벨) 산출 및 표시·광고 공정화법 준수 안전 대체 문구 자동 생성</a:t>
+              <a:t>문장·장면별 위험도(4대 레벨) 산출 및 하도급거래 공정화법 준수 안전 대체 조항 자동 생성</a:t>
             </a:r>
             <a:endParaRPr b="0" i="0" sz="1400" u="none" cap="none" strike="noStrike">
               <a:solidFill>
@@ -21571,7 +21571,7 @@
                 <a:cs typeface="Malgun Gothic"/>
                 <a:sym typeface="Malgun Gothic"/>
               </a:rPr>
-              <a:t>AI 1차 심의 리포트 생성</a:t>
+              <a:t>AI 1차 검증 리포트 생성</a:t>
             </a:r>
             <a:endParaRPr b="0" i="0" sz="1400" u="none" cap="none" strike="noStrike">
               <a:solidFill>
@@ -21748,7 +21748,7 @@
                 <a:cs typeface="Malgun Gothic"/>
                 <a:sym typeface="Malgun Gothic"/>
               </a:rPr>
-              <a:t>통합 콘솔 RA 정밀 심의</a:t>
+              <a:t>통합 콘솔 QA 정밀 검증</a:t>
             </a:r>
             <a:endParaRPr b="0" i="0" sz="1400" u="none" cap="none" strike="noStrike">
               <a:solidFill>
@@ -21842,7 +21842,7 @@
                 </a:solidFill>
                 <a:latin typeface="Malgun Gothic"/>
               </a:rPr>
-              <a:t>통합 웹(:3104) 동영상 재생·특정화면 정지 장면 추가/편집/삭제(BO➔Agent EKS Service 호출), 상충 비교</a:t>
+              <a:t>통합 웹(:3104) 설계도면 재생·특정화면 정지 장면 추가/편집/삭제(BO➔Agent EKS Service 호출), 상충 비교</a:t>
             </a:r>
           </a:p>
         </p:txBody>
@@ -21975,7 +21975,7 @@
                 <a:cs typeface="Malgun Gothic"/>
                 <a:sym typeface="Malgun Gothic"/>
               </a:rPr>
-              <a:t>RA 최종 확정 &amp; 골든셋</a:t>
+              <a:t>QA 최종 확정 &amp; 골든셋</a:t>
             </a:r>
             <a:endParaRPr b="0" i="0" sz="1400" u="none" cap="none" strike="noStrike">
               <a:solidFill>
@@ -22015,7 +22015,7 @@
                 <a:cs typeface="Malgun Gothic"/>
                 <a:sym typeface="Malgun Gothic"/>
               </a:rPr>
-              <a:t>승인/조건부승인/반려 처리 및 RA '반영/확정' 데이터 정답지(Golden Set) 자동 축적</a:t>
+              <a:t>승인/조건부승인/반려 처리 및 QA '반영/확정' 데이터 정답지(Golden Set) 자동 축적</a:t>
             </a:r>
             <a:endParaRPr b="0" i="0" sz="1400" u="none" cap="none" strike="noStrike">
               <a:solidFill>
@@ -22268,7 +22268,7 @@
                 <a:cs typeface="Malgun Gothic"/>
                 <a:sym typeface="Malgun Gothic"/>
               </a:rPr>
-              <a:t>원장 적재 &amp; 마케팅허브 회신</a:t>
+              <a:t>원장 적재 &amp; 전자구매포털 회신</a:t>
             </a:r>
             <a:endParaRPr b="0" i="0" sz="1400" u="none" cap="none" strike="noStrike">
               <a:solidFill>
@@ -22384,7 +22384,7 @@
                 <a:cs typeface="Malgun Gothic"/>
                 <a:sym typeface="Malgun Gothic"/>
               </a:rPr>
-              <a:t>ReviewHistoryImmutable WORM 영구 보존(5년 법정 보관 및 위변조 해시 체이닝)</a:t>
+              <a:t>VerifyHistoryImmutable WORM 영구 보존(5년 법정 보관 및 위변조 해시 체이닝)</a:t>
             </a:r>
             <a:endParaRPr b="0" i="0" sz="1400" u="none" cap="none" strike="noStrike">
               <a:solidFill>
@@ -22526,7 +22526,7 @@
                 <a:cs typeface="Malgun Gothic"/>
                 <a:sym typeface="Malgun Gothic"/>
               </a:rPr>
-              <a:t>마케팅허브 결과(HTML/JSON) 회신</a:t>
+              <a:t>전자구매포털 결과(HTML/JSON) 회신</a:t>
             </a:r>
             <a:endParaRPr b="0" i="0" sz="1400" u="none" cap="none" strike="noStrike">
               <a:solidFill>
@@ -22566,7 +22566,7 @@
                 <a:cs typeface="Malgun Gothic"/>
                 <a:sym typeface="Malgun Gothic"/>
               </a:rPr>
-              <a:t>심의 요약 JSON + 문장·장면별 판정 + 심의 결과 리포트(HTML/PDF/Excel) 마케팅허브 자동 회신 및 화면 표출</a:t>
+              <a:t>검증 요약 JSON + 문장·장면별 판정 + 검증 결과 리포트(HTML/PDF/Excel) 전자구매포털 자동 회신 및 화면 표출</a:t>
             </a:r>
             <a:endParaRPr b="0" i="0" sz="1400" u="none" cap="none" strike="noStrike">
               <a:solidFill>
@@ -22642,7 +22642,7 @@
                 <a:cs typeface="Malgun Gothic"/>
                 <a:sym typeface="Malgun Gothic"/>
               </a:rPr>
-              <a:t>심의 완료 및 현업 결과 확인</a:t>
+              <a:t>검증 완료 및 현업 결과 확인</a:t>
             </a:r>
             <a:endParaRPr b="0" i="0" sz="1400" u="none" cap="none" strike="noStrike">
               <a:solidFill>
@@ -22733,7 +22733,7 @@
                 <a:cs typeface="Malgun Gothic"/>
                 <a:sym typeface="Malgun Gothic"/>
               </a:rPr>
-              <a:t>4. 마케팅허브(MarketingHub) &amp; 프로덕트랩(ProductLab) 연계 상세 기능 아키텍처 (KT 레몬 Option)</a:t>
+              <a:t>4. 전자구매포털(SRM-Portal) &amp; 피엘엠넥서스(PLM-Nexus) 연계 상세 기능 아키텍처 (HB-Monitor Option)</a:t>
             </a:r>
             <a:endParaRPr b="0" i="0" sz="1400" u="none" cap="none" strike="noStrike">
               <a:solidFill>
@@ -22799,7 +22799,7 @@
                 <a:cs typeface="Malgun Gothic"/>
                 <a:sym typeface="Malgun Gothic"/>
               </a:rPr>
-              <a:t>현업 심의 플랫폼(마케팅허브)과 R&amp;I 연구·실증 플랫폼(프로덕트랩)의 내부 탑재 기능, 데이터 흐름 및 KT 레몬(Option) 비교 검증 구조</a:t>
+              <a:t>현업 검증 플랫폼(전자구매포털)과 선행연구소 연구·시험검증 플랫폼(피엘엠넥서스)의 내부 탑재 기능, 데이터 흐름 및 HB-Monitor(Option) 비교 검증 구조</a:t>
             </a:r>
             <a:endParaRPr b="0" i="0" sz="1400" u="none" cap="none" strike="noStrike">
               <a:solidFill>
@@ -22936,7 +22936,7 @@
                 <a:cs typeface="Malgun Gothic"/>
                 <a:sym typeface="Malgun Gothic"/>
               </a:rPr>
-              <a:t>마케팅허브 (MarketingHub) — 마케팅(BM) · RA 현업 심의 플랫폼</a:t>
+              <a:t>전자구매포털 (SRM-Portal) — 구매조달(Buyer) · QA 현업 검증 플랫폼</a:t>
             </a:r>
             <a:endParaRPr b="0" i="0" sz="1400" u="none" cap="none" strike="noStrike">
               <a:solidFill>
@@ -22976,7 +22976,7 @@
                 <a:cs typeface="Malgun Gothic"/>
                 <a:sym typeface="Malgun Gothic"/>
               </a:rPr>
-              <a:t>현업 주 작업 시스템 (웹 화면 + 전성분/배합한도 RDB 보유)</a:t>
+              <a:t>현업 주 작업 시스템 (웹 화면 + 자재BOM/유해물질한도 RDB 보유)</a:t>
             </a:r>
             <a:endParaRPr b="0" i="0" sz="1400" u="none" cap="none" strike="noStrike">
               <a:solidFill>
@@ -23052,7 +23052,7 @@
                 <a:cs typeface="Malgun Gothic"/>
                 <a:sym typeface="Malgun Gothic"/>
               </a:rPr>
-              <a:t>① 심의 의뢰 등록 및 대용량 시안·영상(300MB) 업로드 연동</a:t>
+              <a:t>① 검증 요청 등록 및 대용량 계약·도서·영상(300MB) 업로드 연동</a:t>
             </a:r>
             <a:endParaRPr b="0" i="0" sz="1400" u="none" cap="none" strike="noStrike">
               <a:solidFill>
@@ -23085,19 +23085,19 @@
             <a:r>
               <a:rPr b="0" i="0" lang="en-US" sz="720" u="none" cap="none" strike="noStrike">
                 <a:solidFill>
-                  <a:srgbClr val="1E293B"/>
+                  <a:srgbClr val="0F2942"/>
                 </a:solidFill>
                 <a:latin typeface="Malgun Gothic"/>
                 <a:ea typeface="Malgun Gothic"/>
                 <a:cs typeface="Malgun Gothic"/>
                 <a:sym typeface="Malgun Gothic"/>
               </a:rPr>
-              <a:t>• 마케터(BM) 마케팅허브에서 광고 심의 의뢰 등록 및 메타데이터 전송 • 대용량 영상·시안(300MB)은 마케팅허브 부하 방지 위해 연계 API(:18085) S3 직접 업로드</a:t>
+              <a:t>• 구매담당자(Buyer) 전자구매포털에서 계약·규격 검증 의뢰 등록 및 메타데이터 전송 • 대용량 영상·계약·도서(300MB)은 전자구매포털 부하 방지 위해 연계 API(:18085) S3 직접 업로드</a:t>
             </a:r>
             <a:br>
               <a:rPr b="0" i="0" lang="en-US" sz="720" u="none" cap="none" strike="noStrike">
                 <a:solidFill>
-                  <a:srgbClr val="1E293B"/>
+                  <a:srgbClr val="0F2942"/>
                 </a:solidFill>
                 <a:latin typeface="Malgun Gothic"/>
                 <a:ea typeface="Malgun Gothic"/>
@@ -23108,7 +23108,7 @@
             <a:r>
               <a:rPr b="0" i="0" lang="en-US" sz="720" u="none" cap="none" strike="noStrike">
                 <a:solidFill>
-                  <a:srgbClr val="1E293B"/>
+                  <a:srgbClr val="0F2942"/>
                 </a:solidFill>
                 <a:latin typeface="Malgun Gothic"/>
                 <a:ea typeface="Malgun Gothic"/>
@@ -23188,7 +23188,7 @@
                 </a:solidFill>
                 <a:latin typeface="Malgun Gothic"/>
               </a:rPr>
-              <a:t>② 동영상(MP4) 1차 AI 피크프레임 추출 &amp; 2차 웹 화면 장면 보정</a:t>
+              <a:t>② 설계도면(CAD/PDF) 1차 AI 도면 규격영역 추출 &amp; 2차 웹 화면 장면 보정</a:t>
             </a:r>
             <a:endParaRPr b="0" i="0" sz="1400" u="none" cap="none" strike="noStrike">
               <a:solidFill>
@@ -23205,11 +23205,11 @@
             <a:r>
               <a:rPr sz="720" b="0">
                 <a:solidFill>
-                  <a:srgbClr val="1E293B"/>
-                </a:solidFill>
-                <a:latin typeface="Malgun Gothic"/>
-              </a:rPr>
-              <a:t>• 1차: AI 에이전트가 OpenCV로 영상 피크프레임·미세각주 자동 추출</a:t>
+                  <a:srgbClr val="0F2942"/>
+                </a:solidFill>
+                <a:latin typeface="Malgun Gothic"/>
+              </a:rPr>
+              <a:t>• 1차: AI 에이전트가 OpenCV로 도면 핵심규격·특약주석 자동 추출</a:t>
             </a:r>
           </a:p>
           <a:p>
@@ -23217,7 +23217,7 @@
             <a:r>
               <a:rPr sz="720" b="0">
                 <a:solidFill>
-                  <a:srgbClr val="1E293B"/>
+                  <a:srgbClr val="0F2942"/>
                 </a:solidFill>
                 <a:latin typeface="Malgun Gothic"/>
               </a:rPr>
@@ -23288,7 +23288,7 @@
                 <a:cs typeface="Malgun Gothic"/>
                 <a:sym typeface="Malgun Gothic"/>
               </a:rPr>
-              <a:t>③ SyncGuard AI 심의 실행 요청 송신 (REST API)</a:t>
+              <a:t>③ SyncFlow AI 검증 실행 요청 송신 (REST API)</a:t>
             </a:r>
             <a:endParaRPr b="0" i="0" sz="1400" u="none" cap="none" strike="noStrike">
               <a:solidFill>
@@ -23321,19 +23321,19 @@
             <a:r>
               <a:rPr b="0" i="0" lang="en-US" sz="720" u="none" cap="none" strike="noStrike">
                 <a:solidFill>
-                  <a:srgbClr val="1E293B"/>
+                  <a:srgbClr val="0F2942"/>
                 </a:solidFill>
                 <a:latin typeface="Malgun Gothic"/>
                 <a:ea typeface="Malgun Gothic"/>
                 <a:cs typeface="Malgun Gothic"/>
                 <a:sym typeface="Malgun Gothic"/>
               </a:rPr>
-              <a:t>• 신청 건의 시안·영상 메타데이터를 SyncGuard AI 연계 API(:18085)로 전송_x000B_• 단건/일괄 [AI 검증 실행] 트리거 및 비동기 진행 상태(QUEUED/PROCESSING) 실시간 연동</a:t>
+              <a:t>• 신청 건의 계약·도서·영상 메타데이터를 SyncFlow AI 연계 API(:18085)로 전송_x000B_• 단건/일괄 [AI 검증 실행] 트리거 및 비동기 진행 상태(QUEUED/PROCESSING) 실시간 연동</a:t>
             </a:r>
             <a:br>
               <a:rPr b="0" i="0" lang="en-US" sz="720" u="none" cap="none" strike="noStrike">
                 <a:solidFill>
-                  <a:srgbClr val="1E293B"/>
+                  <a:srgbClr val="0F2942"/>
                 </a:solidFill>
                 <a:latin typeface="Malgun Gothic"/>
                 <a:ea typeface="Malgun Gothic"/>
@@ -23344,7 +23344,7 @@
             <a:r>
               <a:rPr b="0" i="0" lang="en-US" sz="720" u="none" cap="none" strike="noStrike">
                 <a:solidFill>
-                  <a:srgbClr val="1E293B"/>
+                  <a:srgbClr val="0F2942"/>
                 </a:solidFill>
                 <a:latin typeface="Malgun Gothic"/>
                 <a:ea typeface="Malgun Gothic"/>
@@ -23427,7 +23427,7 @@
                 <a:cs typeface="Malgun Gothic"/>
                 <a:sym typeface="Malgun Gothic"/>
               </a:rPr>
-              <a:t>④ 화장품 전성분 · 배합한도 마스터 RDB 제공</a:t>
+              <a:t>④ 전장부품 자재BOM · 유해물질한도 마스터 RDB 제공</a:t>
             </a:r>
             <a:endParaRPr b="0" i="0" sz="1400" u="none" cap="none" strike="noStrike">
               <a:solidFill>
@@ -23460,19 +23460,19 @@
             <a:r>
               <a:rPr b="0" i="0" lang="en-US" sz="720" u="none" cap="none" strike="noStrike">
                 <a:solidFill>
-                  <a:srgbClr val="1E293B"/>
+                  <a:srgbClr val="0F2942"/>
                 </a:solidFill>
                 <a:latin typeface="Malgun Gothic"/>
                 <a:ea typeface="Malgun Gothic"/>
                 <a:cs typeface="Malgun Gothic"/>
                 <a:sym typeface="Malgun Gothic"/>
               </a:rPr>
-              <a:t>• 마케팅허브 RDB 내 화장품 전성분 표준 사전, 영문 INCI, 배합한도(%), 금지원료 보유</a:t>
+              <a:t>• 전자구매포털 RDB 내 전장부품 자재BOM 표준 사전, 영문 CAS/RoHS, 유해물질한도(%), 금지원소재 보유</a:t>
             </a:r>
             <a:br>
               <a:rPr b="0" i="0" lang="en-US" sz="720" u="none" cap="none" strike="noStrike">
                 <a:solidFill>
-                  <a:srgbClr val="1E293B"/>
+                  <a:srgbClr val="0F2942"/>
                 </a:solidFill>
                 <a:latin typeface="Malgun Gothic"/>
                 <a:ea typeface="Malgun Gothic"/>
@@ -23483,14 +23483,14 @@
             <a:r>
               <a:rPr b="0" i="0" lang="en-US" sz="720" u="none" cap="none" strike="noStrike">
                 <a:solidFill>
-                  <a:srgbClr val="1E293B"/>
+                  <a:srgbClr val="0F2942"/>
                 </a:solidFill>
                 <a:latin typeface="Malgun Gothic"/>
                 <a:ea typeface="Malgun Gothic"/>
                 <a:cs typeface="Malgun Gothic"/>
                 <a:sym typeface="Malgun Gothic"/>
               </a:rPr>
-              <a:t>• SyncGuard AI 룰 엔진이 성분 표기 적정성 및 배합한도 초과 여부 대조 시 참조</a:t>
+              <a:t>• SyncFlow AI 룰 엔진이 성분 표기 적정성 및 유해물질한도 초과 여부 대조 시 참조</a:t>
             </a:r>
             <a:endParaRPr b="0" i="0" sz="1400" u="none" cap="none" strike="noStrike">
               <a:solidFill>
@@ -23566,7 +23566,7 @@
                 <a:cs typeface="Malgun Gothic"/>
                 <a:sym typeface="Malgun Gothic"/>
               </a:rPr>
-              <a:t>⑤ 최종 심의 결과(HTML/JSON) 수신 &amp; 마케팅허브 화면 표출</a:t>
+              <a:t>⑤ 최종 검증 결과(HTML/JSON) 수신 &amp; 전자구매포털 화면 표출</a:t>
             </a:r>
             <a:endParaRPr b="0" i="0" sz="1400" u="none" cap="none" strike="noStrike">
               <a:solidFill>
@@ -23599,19 +23599,19 @@
             <a:r>
               <a:rPr b="0" i="0" lang="en-US" sz="720" u="none" cap="none" strike="noStrike">
                 <a:solidFill>
-                  <a:srgbClr val="1E293B"/>
+                  <a:srgbClr val="0F2942"/>
                 </a:solidFill>
                 <a:latin typeface="Malgun Gothic"/>
                 <a:ea typeface="Malgun Gothic"/>
                 <a:cs typeface="Malgun Gothic"/>
                 <a:sym typeface="Malgun Gothic"/>
               </a:rPr>
-              <a:t>• RA 확정 완료 시 문장·장면별 판정 등급, 위반 법령, 대체 문구 및 심의 결과 리포트(HTML/JSON/PDF)를 수신하여 마케팅허브 화면에 표출</a:t>
+              <a:t>• QA 확정 완료 시 문장·장면별 판정 등급, 위반 법령, 대체 조항 및 검증 결과 리포트(HTML/JSON/PDF)를 수신하여 전자구매포털 화면에 표출</a:t>
             </a:r>
             <a:br>
               <a:rPr b="0" i="0" lang="en-US" sz="720" u="none" cap="none" strike="noStrike">
                 <a:solidFill>
-                  <a:srgbClr val="1E293B"/>
+                  <a:srgbClr val="0F2942"/>
                 </a:solidFill>
                 <a:latin typeface="Malgun Gothic"/>
                 <a:ea typeface="Malgun Gothic"/>
@@ -23622,7 +23622,7 @@
             <a:r>
               <a:rPr b="0" i="0" lang="en-US" sz="720" u="none" cap="none" strike="noStrike">
                 <a:solidFill>
-                  <a:srgbClr val="1E293B"/>
+                  <a:srgbClr val="0F2942"/>
                 </a:solidFill>
                 <a:latin typeface="Malgun Gothic"/>
                 <a:ea typeface="Malgun Gothic"/>
@@ -23705,7 +23705,7 @@
                 <a:cs typeface="Malgun Gothic"/>
                 <a:sym typeface="Malgun Gothic"/>
               </a:rPr>
-              <a:t>⑥ RA 최종 검토·승인 확정 및 골든셋(Golden Set) 환류</a:t>
+              <a:t>⑥ QA 최종 검토·승인 확정 및 골든셋(Golden Set) 환류</a:t>
             </a:r>
             <a:endParaRPr b="0" i="0" sz="1400" u="none" cap="none" strike="noStrike">
               <a:solidFill>
@@ -23738,19 +23738,19 @@
             <a:r>
               <a:rPr b="0" i="0" lang="en-US" sz="720" u="none" cap="none" strike="noStrike">
                 <a:solidFill>
-                  <a:srgbClr val="1E293B"/>
+                  <a:srgbClr val="0F2942"/>
                 </a:solidFill>
                 <a:latin typeface="Malgun Gothic"/>
                 <a:ea typeface="Malgun Gothic"/>
                 <a:cs typeface="Malgun Gothic"/>
                 <a:sym typeface="Malgun Gothic"/>
               </a:rPr>
-              <a:t>• RA 담당자 최종 판정(승인 / 조건부승인 / 반려) 및 수정 의견 확정 처리</a:t>
+              <a:t>• 법무·QA 담당자 최종 판정(승인 / 조건부승인 / 반려) 및 수정 의견 확정 처리</a:t>
             </a:r>
             <a:br>
               <a:rPr b="0" i="0" lang="en-US" sz="720" u="none" cap="none" strike="noStrike">
                 <a:solidFill>
-                  <a:srgbClr val="1E293B"/>
+                  <a:srgbClr val="0F2942"/>
                 </a:solidFill>
                 <a:latin typeface="Malgun Gothic"/>
                 <a:ea typeface="Malgun Gothic"/>
@@ -23761,14 +23761,14 @@
             <a:r>
               <a:rPr b="0" i="0" lang="en-US" sz="720" u="none" cap="none" strike="noStrike">
                 <a:solidFill>
-                  <a:srgbClr val="1E293B"/>
+                  <a:srgbClr val="0F2942"/>
                 </a:solidFill>
                 <a:latin typeface="Malgun Gothic"/>
                 <a:ea typeface="Malgun Gothic"/>
                 <a:cs typeface="Malgun Gothic"/>
                 <a:sym typeface="Malgun Gothic"/>
               </a:rPr>
-              <a:t>• RA가 채택·수정한 '반영' 데이터를 SyncGuard AI 정답지(골든셋)로 자동 피드백</a:t>
+              <a:t>• QA가 채택·수정한 '반영' 데이터를 SyncFlow AI 정답지(골든셋)로 자동 피드백</a:t>
             </a:r>
             <a:endParaRPr b="0" i="0" sz="1400" u="none" cap="none" strike="noStrike">
               <a:solidFill>
@@ -23905,7 +23905,7 @@
                 <a:cs typeface="Malgun Gothic"/>
                 <a:sym typeface="Malgun Gothic"/>
               </a:rPr>
-              <a:t>SyncGuard AI 5대 모듈 코어 엔진 (AWS EKS 분리)</a:t>
+              <a:t>SyncFlow AI 5대 모듈 코어 엔진 (AWS EKS 분리)</a:t>
             </a:r>
             <a:endParaRPr b="0" i="0" sz="1400" u="none" cap="none" strike="noStrike">
               <a:solidFill>
@@ -24018,7 +24018,7 @@
                 </a:solidFill>
                 <a:latin typeface="Malgun Gothic"/>
               </a:rPr>
-              <a:t>AI 피크프레임 추출 + 웹 보정 &amp; 선택형 OCR</a:t>
+              <a:t>AI 도면 규격영역 추출 + 웹 보정 &amp; 선택형 OCR</a:t>
             </a:r>
             <a:endParaRPr b="0" i="0" sz="1400" u="none" cap="none" strike="noStrike">
               <a:solidFill>
@@ -24035,11 +24035,11 @@
             <a:r>
               <a:rPr sz="720" b="0">
                 <a:solidFill>
-                  <a:srgbClr val="1E293B"/>
-                </a:solidFill>
-                <a:latin typeface="Malgun Gothic"/>
-              </a:rPr>
-              <a:t>• OpenCV 1차 피크프레임 자동추출 + 웹 동영상 재생 장면 추가·편집·삭제(BO·API ➔ Agent EKS Service 호출)</a:t>
+                  <a:srgbClr val="0F2942"/>
+                </a:solidFill>
+                <a:latin typeface="Malgun Gothic"/>
+              </a:rPr>
+              <a:t>• OpenCV 1차 도면스냅샷 자동추출 + 웹 설계도면 재생 장면 추가·편집·삭제(BO·API ➔ Agent EKS Service 호출)</a:t>
             </a:r>
           </a:p>
           <a:p>
@@ -24047,11 +24047,11 @@
             <a:r>
               <a:rPr sz="720" b="0">
                 <a:solidFill>
-                  <a:srgbClr val="1E293B"/>
-                </a:solidFill>
-                <a:latin typeface="Malgun Gothic"/>
-              </a:rPr>
-              <a:t>• 네이버 클로바 OCR / 패들 OCR 선택 구동</a:t>
+                  <a:srgbClr val="0F2942"/>
+                </a:solidFill>
+                <a:latin typeface="Malgun Gothic"/>
+              </a:rPr>
+              <a:t>• 엔터프라이즈 비전 OCR / 도면 OCR 선택 구동</a:t>
             </a:r>
           </a:p>
         </p:txBody>
@@ -24118,7 +24118,7 @@
                 <a:cs typeface="Malgun Gothic"/>
                 <a:sym typeface="Malgun Gothic"/>
               </a:rPr>
-              <a:t>1차 결정론적 규제 룰 &amp; 전성분 대조 엔진</a:t>
+              <a:t>1차 결정론적 규제 룰 &amp; 자재BOM 대조 엔진</a:t>
             </a:r>
             <a:endParaRPr b="0" i="0" sz="1400" u="none" cap="none" strike="noStrike">
               <a:solidFill>
@@ -24151,19 +24151,19 @@
             <a:r>
               <a:rPr b="0" i="0" lang="en-US" sz="720" u="none" cap="none" strike="noStrike">
                 <a:solidFill>
-                  <a:srgbClr val="1E293B"/>
+                  <a:srgbClr val="0F2942"/>
                 </a:solidFill>
                 <a:latin typeface="Malgun Gothic"/>
                 <a:ea typeface="Malgun Gothic"/>
                 <a:cs typeface="Malgun Gothic"/>
                 <a:sym typeface="Malgun Gothic"/>
               </a:rPr>
-              <a:t>• 식약처 100대 표시·광고 가이드라인 + 금지/주의 표현사전 스캔</a:t>
+              <a:t>• 공정위·표준원 100대 계약·기술규격 가이드라인 + 금지/주의 표현사전 스캔</a:t>
             </a:r>
             <a:br>
               <a:rPr b="0" i="0" lang="en-US" sz="720" u="none" cap="none" strike="noStrike">
                 <a:solidFill>
-                  <a:srgbClr val="1E293B"/>
+                  <a:srgbClr val="0F2942"/>
                 </a:solidFill>
                 <a:latin typeface="Malgun Gothic"/>
                 <a:ea typeface="Malgun Gothic"/>
@@ -24174,19 +24174,19 @@
             <a:r>
               <a:rPr b="0" i="0" lang="en-US" sz="720" u="none" cap="none" strike="noStrike">
                 <a:solidFill>
-                  <a:srgbClr val="1E293B"/>
+                  <a:srgbClr val="0F2942"/>
                 </a:solidFill>
                 <a:latin typeface="Malgun Gothic"/>
                 <a:ea typeface="Malgun Gothic"/>
                 <a:cs typeface="Malgun Gothic"/>
                 <a:sym typeface="Malgun Gothic"/>
               </a:rPr>
-              <a:t>• 마케팅허브 전성분·배합한도 RDB 연동 성분 적정성 검증</a:t>
+              <a:t>• 전자구매포털 자재BOM·유해물질한도 RDB 연동 성분 적정성 검증</a:t>
             </a:r>
             <a:br>
               <a:rPr b="0" i="0" lang="en-US" sz="720" u="none" cap="none" strike="noStrike">
                 <a:solidFill>
-                  <a:srgbClr val="1E293B"/>
+                  <a:srgbClr val="0F2942"/>
                 </a:solidFill>
                 <a:latin typeface="Malgun Gothic"/>
                 <a:ea typeface="Malgun Gothic"/>
@@ -24197,7 +24197,7 @@
             <a:r>
               <a:rPr b="0" i="0" lang="en-US" sz="720" u="none" cap="none" strike="noStrike">
                 <a:solidFill>
-                  <a:srgbClr val="1E293B"/>
+                  <a:srgbClr val="0F2942"/>
                 </a:solidFill>
                 <a:latin typeface="Malgun Gothic"/>
                 <a:ea typeface="Malgun Gothic"/>
@@ -24280,7 +24280,7 @@
                 <a:cs typeface="Malgun Gothic"/>
                 <a:sym typeface="Malgun Gothic"/>
               </a:rPr>
-              <a:t>2차 하이브리드 RAG · 실증 매칭 · 과거 상충 탐지</a:t>
+              <a:t>2차 하이브리드 RAG · 시험검증 매칭 · 과거 상충 탐지</a:t>
             </a:r>
             <a:endParaRPr b="0" i="0" sz="1400" u="none" cap="none" strike="noStrike">
               <a:solidFill>
@@ -24313,19 +24313,19 @@
             <a:r>
               <a:rPr b="0" i="0" lang="en-US" sz="720" u="none" cap="none" strike="noStrike">
                 <a:solidFill>
-                  <a:srgbClr val="1E293B"/>
+                  <a:srgbClr val="0F2942"/>
                 </a:solidFill>
                 <a:latin typeface="Malgun Gothic"/>
                 <a:ea typeface="Malgun Gothic"/>
                 <a:cs typeface="Malgun Gothic"/>
                 <a:sym typeface="Malgun Gothic"/>
               </a:rPr>
-              <a:t>• 식약처 법령 마크다운 계층 청킹 pgvector(1536d) + BM25 리랭킹_x000B_• ProductLab 임상/설문 보고서 대조 및 과거 심의 이력 등급 상충 자동 탐지</a:t>
+              <a:t>• 공정위·표준원 법령 마크다운 계층 청킹 pgvector(1536d) + BM25 리랭킹_x000B_• PLM-Nexus 신뢰성/설문 보고서 대조 및 과거 검증 이력 등급 상충 자동 탐지</a:t>
             </a:r>
             <a:br>
               <a:rPr b="0" i="0" lang="en-US" sz="720" u="none" cap="none" strike="noStrike">
                 <a:solidFill>
-                  <a:srgbClr val="1E293B"/>
+                  <a:srgbClr val="0F2942"/>
                 </a:solidFill>
                 <a:latin typeface="Malgun Gothic"/>
                 <a:ea typeface="Malgun Gothic"/>
@@ -24336,7 +24336,7 @@
             <a:r>
               <a:rPr b="0" i="0" lang="en-US" sz="720" u="none" cap="none" strike="noStrike">
                 <a:solidFill>
-                  <a:srgbClr val="1E293B"/>
+                  <a:srgbClr val="0F2942"/>
                 </a:solidFill>
                 <a:latin typeface="Malgun Gothic"/>
                 <a:ea typeface="Malgun Gothic"/>
@@ -24452,19 +24452,19 @@
             <a:r>
               <a:rPr b="0" i="0" lang="en-US" sz="720" u="none" cap="none" strike="noStrike">
                 <a:solidFill>
-                  <a:srgbClr val="1E293B"/>
+                  <a:srgbClr val="0F2942"/>
                 </a:solidFill>
                 <a:latin typeface="Malgun Gothic"/>
                 <a:ea typeface="Malgun Gothic"/>
                 <a:cs typeface="Malgun Gothic"/>
                 <a:sym typeface="Malgun Gothic"/>
               </a:rPr>
-              <a:t>• 동시 4건 세마포어 제어 및 초과 요청 QUEUED 대기열 워커 순차 처리 (실패 건 수동 재실행) • Zero Data Retention 상용 LLM 3단계 추론 및 안전 대체문구 추천</a:t>
+              <a:t>• 동시 4건 세마포어 제어 및 초과 요청 QUEUED 대기열 워커 순차 처리 (실패 건 수동 재실행) • Zero Data Retention 상용 LLM 3단계 추론 및 안전 표준수정조항 추천</a:t>
             </a:r>
             <a:br>
               <a:rPr b="0" i="0" lang="en-US" sz="720" u="none" cap="none" strike="noStrike">
                 <a:solidFill>
-                  <a:srgbClr val="1E293B"/>
+                  <a:srgbClr val="0F2942"/>
                 </a:solidFill>
                 <a:latin typeface="Malgun Gothic"/>
                 <a:ea typeface="Malgun Gothic"/>
@@ -24475,7 +24475,7 @@
             <a:r>
               <a:rPr b="0" i="0" lang="en-US" sz="720" u="none" cap="none" strike="noStrike">
                 <a:solidFill>
-                  <a:srgbClr val="1E293B"/>
+                  <a:srgbClr val="0F2942"/>
                 </a:solidFill>
                 <a:latin typeface="Malgun Gothic"/>
                 <a:ea typeface="Malgun Gothic"/>
@@ -24558,7 +24558,7 @@
                 <a:cs typeface="Malgun Gothic"/>
                 <a:sym typeface="Malgun Gothic"/>
               </a:rPr>
-              <a:t>SyncGuard AI 통합 웹 콘솔(:3104) &amp; 마케팅허브 결과 연동</a:t>
+              <a:t>SyncFlow AI 통합 웹 콘솔(:3104) &amp; 전자구매포털 결과 연동</a:t>
             </a:r>
             <a:endParaRPr b="0" i="0" sz="1400" u="none" cap="none" strike="noStrike">
               <a:solidFill>
@@ -24591,19 +24591,19 @@
             <a:r>
               <a:rPr b="0" i="0" lang="en-US" sz="720" u="none" cap="none" strike="noStrike">
                 <a:solidFill>
-                  <a:srgbClr val="1E293B"/>
+                  <a:srgbClr val="0F2942"/>
                 </a:solidFill>
                 <a:latin typeface="Malgun Gothic"/>
                 <a:ea typeface="Malgun Gothic"/>
                 <a:cs typeface="Malgun Gothic"/>
                 <a:sym typeface="Malgun Gothic"/>
               </a:rPr>
-              <a:t>• 통합 웹(:3104): 시안/영상 대조 심의, 실증요청 메일 발송, 리포트(HTML/PDF/Excel), 백오피스 관리 통합 • 마케팅허브: 의뢰 연계 및 확정 결과 표출</a:t>
+              <a:t>• 통합 웹(:3104): 계약·도서/영상 대조 검증, 성적서요청 메일 발송, 리포트(HTML/PDF/Excel), 백오피스 관리 통합 • 전자구매포털: 의뢰 연계 및 확정 결과 표출</a:t>
             </a:r>
             <a:br>
               <a:rPr b="0" i="0" lang="en-US" sz="720" u="none" cap="none" strike="noStrike">
                 <a:solidFill>
-                  <a:srgbClr val="1E293B"/>
+                  <a:srgbClr val="0F2942"/>
                 </a:solidFill>
                 <a:latin typeface="Malgun Gothic"/>
                 <a:ea typeface="Malgun Gothic"/>
@@ -24614,7 +24614,7 @@
             <a:r>
               <a:rPr b="0" i="0" lang="en-US" sz="720" u="none" cap="none" strike="noStrike">
                 <a:solidFill>
-                  <a:srgbClr val="1E293B"/>
+                  <a:srgbClr val="0F2942"/>
                 </a:solidFill>
                 <a:latin typeface="Malgun Gothic"/>
                 <a:ea typeface="Malgun Gothic"/>
@@ -24758,7 +24758,7 @@
                 <a:cs typeface="Malgun Gothic"/>
                 <a:sym typeface="Malgun Gothic"/>
               </a:rPr>
-              <a:t>프로덕트랩 (ProductLab) — R&amp;I 기술원 실증 플랫폼</a:t>
+              <a:t>피엘엠넥서스 (PLM-Nexus) — 선행연구소 기술원 시험검증 플랫폼</a:t>
             </a:r>
             <a:endParaRPr b="0" i="0" sz="1400" u="none" cap="none" strike="noStrike">
               <a:solidFill>
@@ -24798,7 +24798,7 @@
                 <a:cs typeface="Malgun Gothic"/>
                 <a:sym typeface="Malgun Gothic"/>
               </a:rPr>
-              <a:t>배치 자료 수집 연동 (server-productlab · 데이터브릿지 협업)</a:t>
+              <a:t>배치 자료 수집 연동 (server-plm-nexus · 데이터브릿지 협업)</a:t>
             </a:r>
             <a:endParaRPr b="0" i="0" sz="1400" u="none" cap="none" strike="noStrike">
               <a:solidFill>
@@ -24874,7 +24874,7 @@
                 <a:cs typeface="Malgun Gothic"/>
                 <a:sym typeface="Malgun Gothic"/>
               </a:rPr>
-              <a:t>① 원료 배합 및 세포 효능 데이터 관리/제공</a:t>
+              <a:t>① 원소재 조성 및 배상한도 성능규격 데이터 관리/제공</a:t>
             </a:r>
             <a:endParaRPr b="0" i="0" sz="1400" u="none" cap="none" strike="noStrike">
               <a:solidFill>
@@ -24907,19 +24907,19 @@
             <a:r>
               <a:rPr b="0" i="0" lang="en-US" sz="710" u="none" cap="none" strike="noStrike">
                 <a:solidFill>
-                  <a:srgbClr val="1E293B"/>
+                  <a:srgbClr val="0F2942"/>
                 </a:solidFill>
                 <a:latin typeface="Malgun Gothic"/>
                 <a:ea typeface="Malgun Gothic"/>
                 <a:cs typeface="Malgun Gothic"/>
                 <a:sym typeface="Malgun Gothic"/>
               </a:rPr>
-              <a:t>• 품목·처방코드별 원료 배합비 및 유효성분 함량 메타데이터 제공</a:t>
+              <a:t>• 품목·설계사양코드별 원소재 조성비 및 유효성분 함량 메타데이터 제공</a:t>
             </a:r>
             <a:br>
               <a:rPr b="0" i="0" lang="en-US" sz="710" u="none" cap="none" strike="noStrike">
                 <a:solidFill>
-                  <a:srgbClr val="1E293B"/>
+                  <a:srgbClr val="0F2942"/>
                 </a:solidFill>
                 <a:latin typeface="Malgun Gothic"/>
                 <a:ea typeface="Malgun Gothic"/>
@@ -24930,14 +24930,14 @@
             <a:r>
               <a:rPr b="0" i="0" lang="en-US" sz="710" u="none" cap="none" strike="noStrike">
                 <a:solidFill>
-                  <a:srgbClr val="1E293B"/>
+                  <a:srgbClr val="0F2942"/>
                 </a:solidFill>
                 <a:latin typeface="Malgun Gothic"/>
                 <a:ea typeface="Malgun Gothic"/>
                 <a:cs typeface="Malgun Gothic"/>
                 <a:sym typeface="Malgun Gothic"/>
               </a:rPr>
-              <a:t>• 원료코드별 세포 효능(In-vitro) 실험 결과 및 효능 클레임 근거 보유</a:t>
+              <a:t>• 원소재코드별 배상한도 성능규격(In-vitro) 실험 결과 및 성능규격 규격·계약 근거 보유</a:t>
             </a:r>
             <a:endParaRPr b="0" i="0" sz="1400" u="none" cap="none" strike="noStrike">
               <a:solidFill>
@@ -25013,7 +25013,7 @@
                 <a:cs typeface="Malgun Gothic"/>
                 <a:sym typeface="Malgun Gothic"/>
               </a:rPr>
-              <a:t>② 기술원 인체적용시험 &amp; 설문(HUT) 완료 보고서 제공</a:t>
+              <a:t>② 기술원 공인신뢰성시험 &amp; 설문(HUT) 완료 보고서 제공</a:t>
             </a:r>
             <a:endParaRPr b="0" i="0" sz="1400" u="none" cap="none" strike="noStrike">
               <a:solidFill>
@@ -25046,19 +25046,19 @@
             <a:r>
               <a:rPr b="0" i="0" lang="en-US" sz="710" u="none" cap="none" strike="noStrike">
                 <a:solidFill>
-                  <a:srgbClr val="1E293B"/>
+                  <a:srgbClr val="0F2942"/>
                 </a:solidFill>
                 <a:latin typeface="Malgun Gothic"/>
                 <a:ea typeface="Malgun Gothic"/>
                 <a:cs typeface="Malgun Gothic"/>
                 <a:sym typeface="Malgun Gothic"/>
               </a:rPr>
-              <a:t>• R&amp;I 기술원 임상 시험성적서(피험자수, 시험기관, 기간, 통계 유의성)</a:t>
+              <a:t>• 선행연구소 기술원 신뢰성 시험성적서(시험시료수, 시험기관, 기간, 통계 유의성)</a:t>
             </a:r>
             <a:br>
               <a:rPr b="0" i="0" lang="en-US" sz="710" u="none" cap="none" strike="noStrike">
                 <a:solidFill>
-                  <a:srgbClr val="1E293B"/>
+                  <a:srgbClr val="0F2942"/>
                 </a:solidFill>
                 <a:latin typeface="Malgun Gothic"/>
                 <a:ea typeface="Malgun Gothic"/>
@@ -25069,7 +25069,7 @@
             <a:r>
               <a:rPr b="0" i="0" lang="en-US" sz="710" u="none" cap="none" strike="noStrike">
                 <a:solidFill>
-                  <a:srgbClr val="1E293B"/>
+                  <a:srgbClr val="0F2942"/>
                 </a:solidFill>
                 <a:latin typeface="Malgun Gothic"/>
                 <a:ea typeface="Malgun Gothic"/>
@@ -25185,19 +25185,19 @@
             <a:r>
               <a:rPr b="0" i="0" lang="en-US" sz="710" u="none" cap="none" strike="noStrike">
                 <a:solidFill>
-                  <a:srgbClr val="1E293B"/>
+                  <a:srgbClr val="0F2942"/>
                 </a:solidFill>
                 <a:latin typeface="Malgun Gothic"/>
                 <a:ea typeface="Malgun Gothic"/>
                 <a:cs typeface="Malgun Gothic"/>
                 <a:sym typeface="Malgun Gothic"/>
               </a:rPr>
-              <a:t>• 매일 새벽 02:00 정기 일 배치(ProductLabSyncBatchJob)로 처방·전성분 및 신규 실증보고서 수집</a:t>
+              <a:t>• 매일 새벽 02:00 정기 일 배치(PlmNexusSyncBatchJob)로 설계사양·자재BOM 및 신규 시험검증보고서 수집</a:t>
             </a:r>
             <a:br>
               <a:rPr b="0" i="0" lang="en-US" sz="710" u="none" cap="none" strike="noStrike">
                 <a:solidFill>
-                  <a:srgbClr val="1E293B"/>
+                  <a:srgbClr val="0F2942"/>
                 </a:solidFill>
                 <a:latin typeface="Malgun Gothic"/>
                 <a:ea typeface="Malgun Gothic"/>
@@ -25208,7 +25208,7 @@
             <a:r>
               <a:rPr b="0" i="0" lang="en-US" sz="710" u="none" cap="none" strike="noStrike">
                 <a:solidFill>
-                  <a:srgbClr val="1E293B"/>
+                  <a:srgbClr val="0F2942"/>
                 </a:solidFill>
                 <a:latin typeface="Malgun Gothic"/>
                 <a:ea typeface="Malgun Gothic"/>
@@ -25291,7 +25291,7 @@
                 <a:cs typeface="Malgun Gothic"/>
                 <a:sym typeface="Malgun Gothic"/>
               </a:rPr>
-              <a:t>④ 광고 실증 필요 문구 ↔ 시험성적서 자동 대조</a:t>
+              <a:t>④ 구매계약 시험검증 필요 조항 ↔ 시험성적서 자동 대조</a:t>
             </a:r>
             <a:endParaRPr b="0" i="0" sz="1400" u="none" cap="none" strike="noStrike">
               <a:solidFill>
@@ -25324,19 +25324,19 @@
             <a:r>
               <a:rPr b="0" i="0" lang="en-US" sz="710" u="none" cap="none" strike="noStrike">
                 <a:solidFill>
-                  <a:srgbClr val="1E293B"/>
+                  <a:srgbClr val="0F2942"/>
                 </a:solidFill>
                 <a:latin typeface="Malgun Gothic"/>
                 <a:ea typeface="Malgun Gothic"/>
                 <a:cs typeface="Malgun Gothic"/>
                 <a:sym typeface="Malgun Gothic"/>
               </a:rPr>
-              <a:t>• 시안 내 수치·효능 주장(예: '장벽 78% 개선')과 수집된 보고서 본문·</a:t>
+              <a:t>• 계약·도서 내 수치·성능규격 주장(예: '장벽 78% 개선')과 수집된 보고서 본문·</a:t>
             </a:r>
             <a:br>
               <a:rPr b="0" i="0" lang="en-US" sz="710" u="none" cap="none" strike="noStrike">
                 <a:solidFill>
-                  <a:srgbClr val="1E293B"/>
+                  <a:srgbClr val="0F2942"/>
                 </a:solidFill>
                 <a:latin typeface="Malgun Gothic"/>
                 <a:ea typeface="Malgun Gothic"/>
@@ -25347,14 +25347,14 @@
             <a:r>
               <a:rPr b="0" i="0" lang="en-US" sz="710" u="none" cap="none" strike="noStrike">
                 <a:solidFill>
-                  <a:srgbClr val="1E293B"/>
+                  <a:srgbClr val="0F2942"/>
                 </a:solidFill>
                 <a:latin typeface="Malgun Gothic"/>
                 <a:ea typeface="Malgun Gothic"/>
                 <a:cs typeface="Malgun Gothic"/>
                 <a:sym typeface="Malgun Gothic"/>
               </a:rPr>
-              <a:t>  각주 조건을 자동 매칭하여 실증 부합 여부 및 근거 페이지 제시</a:t>
+              <a:t>  특약주석 조건을 자동 매칭하여 시험검증 부합 여부 및 근거 페이지 제시</a:t>
             </a:r>
             <a:endParaRPr b="0" i="0" sz="1400" u="none" cap="none" strike="noStrike">
               <a:solidFill>
@@ -25491,7 +25491,7 @@
                 <a:cs typeface="Malgun Gothic"/>
                 <a:sym typeface="Malgun Gothic"/>
               </a:rPr>
-              <a:t>[Option] KT 레몬 (KT Lemon) — 비교 검증 후 결정</a:t>
+              <a:t>[Option] HB-Monitor (KT Lemon) — 비교 검증 후 결정</a:t>
             </a:r>
             <a:endParaRPr b="0" i="0" sz="1400" u="none" cap="none" strike="noStrike">
               <a:solidFill>
@@ -25607,7 +25607,7 @@
                 <a:cs typeface="Malgun Gothic"/>
                 <a:sym typeface="Malgun Gothic"/>
               </a:rPr>
-              <a:t>• 역할 정정: 화장품 전성분/배합한도 DB는 KT 레몬이 아닌 [마케팅허브 RDB] 보유</a:t>
+              <a:t>• 역할 정정: 전장부품 자재BOM/유해물질한도 DB는 HB-Monitor이 아닌 [전자구매포털 RDB] 보유</a:t>
             </a:r>
             <a:endParaRPr b="0" i="0" sz="1400" u="none" cap="none" strike="noStrike">
               <a:solidFill>
@@ -25640,14 +25640,14 @@
             <a:r>
               <a:rPr b="0" i="0" lang="en-US" sz="740" u="none" cap="none" strike="noStrike">
                 <a:solidFill>
-                  <a:srgbClr val="1E293B"/>
+                  <a:srgbClr val="0F2942"/>
                 </a:solidFill>
                 <a:latin typeface="Malgun Gothic"/>
                 <a:ea typeface="Malgun Gothic"/>
                 <a:cs typeface="Malgun Gothic"/>
                 <a:sym typeface="Malgun Gothic"/>
               </a:rPr>
-              <a:t>• 옵션 기능: 기술원 완료 보고서(인체적용시험·설문) 텍스트를 벡터 임베딩하여</a:t>
+              <a:t>• 옵션 기능: 기술원 완료 보고서(공인신뢰성시험·설문) 텍스트를 벡터 임베딩하여</a:t>
             </a:r>
             <a:endParaRPr b="0" i="0" sz="1400" u="none" cap="none" strike="noStrike">
               <a:solidFill>
@@ -25680,14 +25680,14 @@
             <a:r>
               <a:rPr b="0" i="0" lang="en-US" sz="740" u="none" cap="none" strike="noStrike">
                 <a:solidFill>
-                  <a:srgbClr val="1E293B"/>
+                  <a:srgbClr val="0F2942"/>
                 </a:solidFill>
                 <a:latin typeface="Malgun Gothic"/>
                 <a:ea typeface="Malgun Gothic"/>
                 <a:cs typeface="Malgun Gothic"/>
                 <a:sym typeface="Malgun Gothic"/>
               </a:rPr>
-              <a:t>  광고 문구와 유사도 매칭하는 외부 RAG 후보 플랫폼</a:t>
+              <a:t>  구매계약 조항과 유사도 매칭하는 외부 RAG 후보 플랫폼</a:t>
             </a:r>
             <a:endParaRPr b="0" i="0" sz="1400" u="none" cap="none" strike="noStrike">
               <a:solidFill>
@@ -25720,14 +25720,14 @@
             <a:r>
               <a:rPr b="0" i="0" lang="en-US" sz="740" u="none" cap="none" strike="noStrike">
                 <a:solidFill>
-                  <a:srgbClr val="1E293B"/>
+                  <a:srgbClr val="0F2942"/>
                 </a:solidFill>
                 <a:latin typeface="Malgun Gothic"/>
                 <a:ea typeface="Malgun Gothic"/>
                 <a:cs typeface="Malgun Gothic"/>
                 <a:sym typeface="Malgun Gothic"/>
               </a:rPr>
-              <a:t>• 적용 방침: SyncGuard AI가 상용 LLM(Claude 등)으로 보고서를 직접 파싱·매칭하는</a:t>
+              <a:t>• 적용 방침: SyncFlow AI가 상용 LLM(Claude 등)으로 보고서를 직접 파싱·매칭하는</a:t>
             </a:r>
             <a:endParaRPr b="0" i="0" sz="1400" u="none" cap="none" strike="noStrike">
               <a:solidFill>
@@ -26388,7 +26388,7 @@
                 <a:cs typeface="Malgun Gothic"/>
                 <a:sym typeface="Malgun Gothic"/>
               </a:rPr>
-              <a:t>사내 SSO(HB-SSO IAM), 마케팅허브 양방향 API/전성분 RDB, 프로덕트랩 실증 배치([Option] KT레몬), 비학습 LLM 보안 및 불변 감사 원장(WORM) 체계</a:t>
+              <a:t>사내 SSO(HB-SSO IAM), 전자구매포털 양방향 API/자재BOM RDB, 피엘엠넥서스 시험검증 배치([Option] HB-Monitor), 비학습 LLM 보안 및 불변 감사 원장(WORM) 체계</a:t>
             </a:r>
             <a:endParaRPr b="0" i="0" sz="1400" u="none" cap="none" strike="noStrike">
               <a:solidFill>
@@ -26924,7 +26924,7 @@
                 <a:cs typeface="Malgun Gothic"/>
                 <a:sym typeface="Malgun Gothic"/>
               </a:rPr>
-              <a:t>역할 기반 권한 체계  |  마케터는 마케팅허브에서 의뢰·결과 조회, RA 심의관·관리자는 사내 IAM 인가 기반 통합 웹 콘솔(:3104) 접근</a:t>
+              <a:t>역할 기반 권한 체계  |  구매담당자는 전자구매포털에서 의뢰·결과 조회, 법무·QA 검토위원·관리자는 사내 IAM 인가 기반 통합 웹 콘솔(:3104) 접근</a:t>
             </a:r>
             <a:r>
               <a:rPr b="0" i="0" lang="en-US" sz="800" u="none" cap="none" strike="noStrike">
@@ -27210,7 +27210,7 @@
                 <a:cs typeface="Malgun Gothic"/>
                 <a:sym typeface="Malgun Gothic"/>
               </a:rPr>
-              <a:t>마케팅허브(MarketingHub) 인터페이스 연동 &amp; 300MB 직접 업로드</a:t>
+              <a:t>전자구매포털(SRM-Portal) 인터페이스 연동 &amp; 300MB 직접 업로드</a:t>
             </a:r>
             <a:endParaRPr b="0" i="0" sz="1400" u="none" cap="none" strike="noStrike">
               <a:solidFill>
@@ -27328,14 +27328,14 @@
             <a:r>
               <a:rPr b="0" i="0" lang="en-US" sz="880" u="none" cap="none" strike="noStrike">
                 <a:solidFill>
-                  <a:srgbClr val="1E293B"/>
+                  <a:srgbClr val="0F2942"/>
                 </a:solidFill>
                 <a:latin typeface="Malgun Gothic"/>
                 <a:ea typeface="Malgun Gothic"/>
                 <a:cs typeface="Malgun Gothic"/>
                 <a:sym typeface="Malgun Gothic"/>
               </a:rPr>
-              <a:t>대용량 우회 업로드  |  마케팅허브 단일 DB 부하 방지를 위해 300MB 영상·시안은 대외 연계 API(:18085) S3 Presigned URL로 직접 업로드</a:t>
+              <a:t>대용량 우회 업로드  |  전자구매포털 단일 DB 부하 방지를 위해 300MB 영상·계약·도서은 대외 연계 API(:18085) S3 Presigned URL로 직접 업로드</a:t>
             </a:r>
             <a:endParaRPr b="0" i="0" sz="1400" u="none" cap="none" strike="noStrike">
               <a:solidFill>
@@ -27453,14 +27453,14 @@
             <a:r>
               <a:rPr b="0" i="0" lang="en-US" sz="880" u="none" cap="none" strike="noStrike">
                 <a:solidFill>
-                  <a:srgbClr val="1E293B"/>
+                  <a:srgbClr val="0F2942"/>
                 </a:solidFill>
                 <a:latin typeface="Malgun Gothic"/>
                 <a:ea typeface="Malgun Gothic"/>
                 <a:cs typeface="Malgun Gothic"/>
                 <a:sym typeface="Malgun Gothic"/>
               </a:rPr>
-              <a:t>전성분/배합한도 RDB  |  마케팅허브 보유 화장품 전성분 표준 사전, 영문 INCI, 배합 한도(%), 금지 원료 RDB 조회·동기화</a:t>
+              <a:t>자재BOM/유해물질한도 RDB  |  전자구매포털 보유 전장부품 자재BOM 표준 사전, 영문 CAS/RoHS, 조성 한도(%), 금지 원소재 RDB 조회·동기화</a:t>
             </a:r>
             <a:endParaRPr b="0" i="0" sz="1400" u="none" cap="none" strike="noStrike">
               <a:solidFill>
@@ -27578,14 +27578,14 @@
             <a:r>
               <a:rPr b="0" i="0" lang="en-US" sz="880" u="none" cap="none" strike="noStrike">
                 <a:solidFill>
-                  <a:srgbClr val="1E293B"/>
+                  <a:srgbClr val="0F2942"/>
                 </a:solidFill>
                 <a:latin typeface="Malgun Gothic"/>
                 <a:ea typeface="Malgun Gothic"/>
                 <a:cs typeface="Malgun Gothic"/>
                 <a:sym typeface="Malgun Gothic"/>
               </a:rPr>
-              <a:t>결과 회신 &amp; 골든셋  |  RA 최종 확정 시 마케팅허브으로 심의 결과(HTML/JSON/PDF) Webhook 회신 및 '반영' 건 골든셋 자동 축적</a:t>
+              <a:t>결과 회신 &amp; 골든셋  |  QA 최종 확정 시 전자구매포털으로 검증 결과(HTML/JSON/PDF) Webhook 회신 및 '반영' 건 골든셋 자동 축적</a:t>
             </a:r>
             <a:endParaRPr b="0" i="0" sz="1400" u="none" cap="none" strike="noStrike">
               <a:solidFill>
@@ -27703,14 +27703,14 @@
             <a:r>
               <a:rPr b="0" i="0" lang="en-US" sz="880" u="none" cap="none" strike="noStrike">
                 <a:solidFill>
-                  <a:srgbClr val="1E293B"/>
+                  <a:srgbClr val="0F2942"/>
                 </a:solidFill>
                 <a:latin typeface="Malgun Gothic"/>
                 <a:ea typeface="Malgun Gothic"/>
                 <a:cs typeface="Malgun Gothic"/>
                 <a:sym typeface="Malgun Gothic"/>
               </a:rPr>
-              <a:t>장애 복구 정책  |  HMAC-SHA256 서명 검증 및 마케팅허브 통신 장애 시 지수 백오프(1분➔5분➔30분) 최대 5회 자동 재시도</a:t>
+              <a:t>장애 복구 정책  |  HMAC-SHA256 서명 검증 및 전자구매포털 통신 장애 시 지수 백오프(1분➔5분➔30분) 최대 5회 자동 재시도</a:t>
             </a:r>
             <a:endParaRPr b="0" i="0" sz="1400" u="none" cap="none" strike="noStrike">
               <a:solidFill>
@@ -27847,7 +27847,7 @@
                 <a:cs typeface="Malgun Gothic"/>
                 <a:sym typeface="Malgun Gothic"/>
               </a:rPr>
-              <a:t>프로덕트랩(ProductLab) 실증 배치 &amp; [Option] KT 레몬 연계</a:t>
+              <a:t>피엘엠넥서스(PLM-Nexus) 시험검증 배치 &amp; [Option] HB-Monitor 연계</a:t>
             </a:r>
             <a:endParaRPr b="0" i="0" sz="1400" u="none" cap="none" strike="noStrike">
               <a:solidFill>
@@ -27965,14 +27965,14 @@
             <a:r>
               <a:rPr b="0" i="0" lang="en-US" sz="880" u="none" cap="none" strike="noStrike">
                 <a:solidFill>
-                  <a:srgbClr val="1E293B"/>
+                  <a:srgbClr val="0F2942"/>
                 </a:solidFill>
                 <a:latin typeface="Malgun Gothic"/>
                 <a:ea typeface="Malgun Gothic"/>
                 <a:cs typeface="Malgun Gothic"/>
                 <a:sym typeface="Malgun Gothic"/>
               </a:rPr>
-              <a:t>ProductLab 새벽 일배치  |  독립 Batch 서버(:18084)에서 매일 새벽 02:00(ProductLabSyncBatchJob) 전성분·처방·시험성적서 동기화</a:t>
+              <a:t>PLM-Nexus 새벽 일배치  |  독립 Batch 서버(:18084)에서 매일 새벽 02:00(PlmNexusSyncBatchJob) 자재BOM·설계사양·시험성적서 동기화</a:t>
             </a:r>
             <a:endParaRPr b="0" i="0" sz="1400" u="none" cap="none" strike="noStrike">
               <a:solidFill>
@@ -28090,14 +28090,14 @@
             <a:r>
               <a:rPr b="0" i="0" lang="en-US" sz="880" u="none" cap="none" strike="noStrike">
                 <a:solidFill>
-                  <a:srgbClr val="1E293B"/>
+                  <a:srgbClr val="0F2942"/>
                 </a:solidFill>
                 <a:latin typeface="Malgun Gothic"/>
                 <a:ea typeface="Malgun Gothic"/>
                 <a:cs typeface="Malgun Gothic"/>
                 <a:sym typeface="Malgun Gothic"/>
               </a:rPr>
-              <a:t>기술원 임상/설문 보고서  |  인체적용시험 완료 보고서 및 설문조사(HUT) PDF·메타데이터 수집 및 광고 실증 문구 자동 대조</a:t>
+              <a:t>기술원 신뢰성/설문 보고서  |  공인신뢰성시험 완료 보고서 및 설문조사(HUT) PDF·메타데이터 수집 및 구매계약 시험검증 조항 자동 대조</a:t>
             </a:r>
             <a:endParaRPr b="0" i="0" sz="1400" u="none" cap="none" strike="noStrike">
               <a:solidFill>
@@ -28222,7 +28222,7 @@
                 <a:cs typeface="Malgun Gothic"/>
                 <a:sym typeface="Malgun Gothic"/>
               </a:rPr>
-              <a:t>[Option] KT 레몬 검증  |  기술원 보고서 벡터 매칭 후보(Option) — 상용 LLM 직접 파싱 방식과 정확도·속도 비교 PoC 후 결정</a:t>
+              <a:t>[Option] HB-Monitor 검증  |  기술원 보고서 벡터 매칭 후보(Option) — 상용 LLM 직접 파싱 방식과 정확도·속도 비교 PoC 후 결정</a:t>
             </a:r>
             <a:endParaRPr b="0" i="0" sz="1400" u="none" cap="none" strike="noStrike">
               <a:solidFill>
@@ -28340,7 +28340,7 @@
             <a:r>
               <a:rPr b="0" i="0" lang="en-US" sz="880" u="none" cap="none" strike="noStrike">
                 <a:solidFill>
-                  <a:srgbClr val="1E293B"/>
+                  <a:srgbClr val="0F2942"/>
                 </a:solidFill>
                 <a:latin typeface="Malgun Gothic"/>
                 <a:ea typeface="Malgun Gothic"/>
@@ -28602,14 +28602,14 @@
             <a:r>
               <a:rPr b="0" i="0" lang="en-US" sz="880" u="none" cap="none" strike="noStrike">
                 <a:solidFill>
-                  <a:srgbClr val="1E293B"/>
+                  <a:srgbClr val="0F2942"/>
                 </a:solidFill>
                 <a:latin typeface="Malgun Gothic"/>
                 <a:ea typeface="Malgun Gothic"/>
                 <a:cs typeface="Malgun Gothic"/>
                 <a:sym typeface="Malgun Gothic"/>
               </a:rPr>
-              <a:t>미출시 신제품 비학습 보장  |  기업용 상용 LLM(Claude 등) Zero Data Retention 계약으로 미출시 신제품 시안 외부 학습 원천 차단</a:t>
+              <a:t>미출시 신제품 비학습 보장  |  기업용 상용 LLM(Claude 등) Zero Data Retention 계약으로 미출시 신제품 계약·도서 외부 학습 원천 차단</a:t>
             </a:r>
             <a:endParaRPr b="0" i="0" sz="1400" u="none" cap="none" strike="noStrike">
               <a:solidFill>
@@ -28727,14 +28727,14 @@
             <a:r>
               <a:rPr b="0" i="0" lang="en-US" sz="880" u="none" cap="none" strike="noStrike">
                 <a:solidFill>
-                  <a:srgbClr val="1E293B"/>
+                  <a:srgbClr val="0F2942"/>
                 </a:solidFill>
                 <a:latin typeface="Malgun Gothic"/>
                 <a:ea typeface="Malgun Gothic"/>
                 <a:cs typeface="Malgun Gothic"/>
                 <a:sym typeface="Malgun Gothic"/>
               </a:rPr>
-              <a:t>영구 불변 감사 원장  |  review_history_immutable(WORM): 시안 문장·영상 장면, AI 1차 판정, RA 수정·확정 내역 INSERT 전용 보존</a:t>
+              <a:t>영구 불변 감사 원장  |  verify_history_immutable(WORM): 계약·도서 문장·영상 장면, AI 1차 판정, QA 수정·확정 내역 INSERT 전용 보존</a:t>
             </a:r>
             <a:endParaRPr b="0" i="0" sz="1400" u="none" cap="none" strike="noStrike">
               <a:solidFill>
@@ -28852,14 +28852,14 @@
             <a:r>
               <a:rPr b="0" i="0" lang="en-US" sz="880" u="none" cap="none" strike="noStrike">
                 <a:solidFill>
-                  <a:srgbClr val="1E293B"/>
+                  <a:srgbClr val="0F2942"/>
                 </a:solidFill>
                 <a:latin typeface="Malgun Gothic"/>
                 <a:ea typeface="Malgun Gothic"/>
                 <a:cs typeface="Malgun Gothic"/>
                 <a:sym typeface="Malgun Gothic"/>
               </a:rPr>
-              <a:t>식약처 행정조사 대응  |  제품 표시·광고 실증제 및 사후 행정조사 대응을 위한 5년 법정 보관 및 공식 심의 리포트 즉시 출력</a:t>
+              <a:t>공정위·표준원 행정조사 대응  |  구매계약·기술규격 시험검증제 및 사후 행정조사 대응을 위한 5년 법정 보관 및 공식 검증 리포트 즉시 출력</a:t>
             </a:r>
             <a:endParaRPr b="0" i="0" sz="1400" u="none" cap="none" strike="noStrike">
               <a:solidFill>
@@ -28977,14 +28977,14 @@
             <a:r>
               <a:rPr b="0" i="0" lang="en-US" sz="880" u="none" cap="none" strike="noStrike">
                 <a:solidFill>
-                  <a:srgbClr val="1E293B"/>
+                  <a:srgbClr val="0F2942"/>
                 </a:solidFill>
                 <a:latin typeface="Malgun Gothic"/>
                 <a:ea typeface="Malgun Gothic"/>
                 <a:cs typeface="Malgun Gothic"/>
                 <a:sym typeface="Malgun Gothic"/>
               </a:rPr>
-              <a:t>데이터 무결성 검증  |  SHA-256 해시 체이닝을 통한 심의 이력 위변조 방지 및 접근 권한별 열람 감사 로그 영구 기록</a:t>
+              <a:t>데이터 무결성 검증  |  SHA-256 해시 체이닝을 통한 검증 이력 위변조 방지 및 접근 권한별 열람 감사 로그 영구 기록</a:t>
             </a:r>
             <a:endParaRPr b="0" i="0" sz="1400" u="none" cap="none" strike="noStrike">
               <a:solidFill>
@@ -29072,7 +29072,7 @@
                 </a:solidFill>
                 <a:latin typeface="Malgun Gothic"/>
               </a:rPr>
-              <a:t>★ 인프라팀 의견 반영: BO ALB(사용자대역 오픈) / 대외연계 ALB(마케팅허브만 오픈) 물리 분리 · BE/API➔Agent EKS Service 통신 · S3 Intelligent-Tiering · AP 기본스펙</a:t>
+              <a:t>★ 인프라팀 의견 반영: BO ALB(사용자대역 오픈) / 대외연계 ALB(전자구매포털만 오픈) 물리 분리 · BE/API➔Agent EKS Service 통신 · S3 Intelligent-Tiering · HB 표준스펙</a:t>
             </a:r>
             <a:endParaRPr b="0" i="0" sz="1400" u="none" cap="none" strike="noStrike">
               <a:solidFill>
@@ -29207,7 +29207,7 @@
             <a:r>
               <a:rPr b="1" i="0" lang="en-US" sz="750" u="none" cap="none" strike="noStrike">
                 <a:solidFill>
-                  <a:srgbClr val="1E293B"/>
+                  <a:srgbClr val="0F2942"/>
                 </a:solidFill>
                 <a:latin typeface="Malgun Gothic"/>
                 <a:ea typeface="Malgun Gothic"/>
@@ -29487,14 +29487,14 @@
             <a:r>
               <a:rPr b="1" i="0" lang="en-US" sz="740" u="none" cap="none" strike="noStrike">
                 <a:solidFill>
-                  <a:srgbClr val="1E293B"/>
+                  <a:srgbClr val="0F2942"/>
                 </a:solidFill>
                 <a:latin typeface="Malgun Gothic"/>
                 <a:ea typeface="Malgun Gothic"/>
                 <a:cs typeface="Malgun Gothic"/>
                 <a:sym typeface="Malgun Gothic"/>
               </a:rPr>
-              <a:t>기업용 LLM &amp; 네이버 OCR (:443)</a:t>
+              <a:t>기업용 LLM &amp; 엔터프라이즈 비전 OCR (:443)</a:t>
             </a:r>
             <a:endParaRPr b="0" i="0" sz="1400" u="none" cap="none" strike="noStrike">
               <a:solidFill>
@@ -29578,7 +29578,7 @@
                 </a:solidFill>
                 <a:latin typeface="Malgun Gothic"/>
               </a:rPr>
-              <a:t>네이버 클로바 OCR(*.apigw.ntruss.com) / 패들OCR</a:t>
+              <a:t>엔터프라이즈 비전 OCR(ocr-api.hanbitglobal.internal) / 패들OCR</a:t>
             </a:r>
           </a:p>
         </p:txBody>
@@ -29708,7 +29708,7 @@
                 <a:cs typeface="Arial"/>
                 <a:sym typeface="Arial"/>
               </a:rPr>
-              <a:t>MKTHUB</a:t>
+              <a:t>SRMP</a:t>
             </a:r>
             <a:endParaRPr b="0" i="0" sz="1400" u="none" cap="none" strike="noStrike">
               <a:solidFill>
@@ -29767,14 +29767,14 @@
             <a:r>
               <a:rPr b="1" i="0" lang="en-US" sz="720" u="none" cap="none" strike="noStrike">
                 <a:solidFill>
-                  <a:srgbClr val="1E293B"/>
+                  <a:srgbClr val="0F2942"/>
                 </a:solidFill>
                 <a:latin typeface="Malgun Gothic"/>
                 <a:ea typeface="Malgun Gothic"/>
                 <a:cs typeface="Malgun Gothic"/>
                 <a:sym typeface="Malgun Gothic"/>
               </a:rPr>
-              <a:t>MarketingHub / ProductLab 방화벽</a:t>
+              <a:t>SRM-Portal / PLM-Nexus 방화벽</a:t>
             </a:r>
             <a:endParaRPr b="0" i="0" sz="1400" u="none" cap="none" strike="noStrike">
               <a:solidFill>
@@ -29837,7 +29837,7 @@
                 </a:solidFill>
                 <a:latin typeface="Malgun Gothic"/>
               </a:rPr>
-              <a:t>마케팅허브 ➔ 대외연계 ALB(:443) 단독 오픈</a:t>
+              <a:t>전자구매포털 ➔ 대외연계 ALB(:443) 단독 오픈</a:t>
             </a:r>
             <a:endParaRPr b="0" i="0" sz="1400" u="none" cap="none" strike="noStrike">
               <a:solidFill>
@@ -29858,7 +29858,7 @@
                 </a:solidFill>
                 <a:latin typeface="Malgun Gothic"/>
               </a:rPr>
-              <a:t>ProductLab: 매일 02:00 일배치 / [Option] 레몬</a:t>
+              <a:t>PLM-Nexus: 매일 02:00 일배치 / [Option] HB-Monitor</a:t>
             </a:r>
           </a:p>
         </p:txBody>
@@ -29984,7 +29984,7 @@
             <a:r>
               <a:rPr b="1" i="0" lang="en-US" sz="720" u="none" cap="none" strike="noStrike">
                 <a:solidFill>
-                  <a:srgbClr val="1E293B"/>
+                  <a:srgbClr val="0F2942"/>
                 </a:solidFill>
                 <a:latin typeface="Malgun Gothic"/>
                 <a:ea typeface="Malgun Gothic"/>
@@ -30841,7 +30841,7 @@
                 </a:solidFill>
                 <a:latin typeface="Malgun Gothic"/>
               </a:rPr>
-              <a:t>★ BO: syncguard-ai-bo-prv-alb</a:t>
+              <a:t>★ BO: syncflow-ai-bo-prv-alb</a:t>
             </a:r>
             <a:endParaRPr b="0" i="0" sz="1400" u="none" cap="none" strike="noStrike">
               <a:solidFill>
@@ -30963,7 +30963,7 @@
             <a:r>
               <a:rPr sz="640" b="0">
                 <a:solidFill>
-                  <a:srgbClr val="1E293B"/>
+                  <a:srgbClr val="0F2942"/>
                 </a:solidFill>
                 <a:latin typeface="Malgun Gothic"/>
               </a:rPr>
@@ -31788,11 +31788,11 @@
             <a:r>
               <a:rPr sz="530" b="0">
                 <a:solidFill>
-                  <a:srgbClr val="1E293B"/>
-                </a:solidFill>
-                <a:latin typeface="Malgun Gothic"/>
-              </a:rPr>
-              <a:t>BO➔Agent 호출 · 상충탐지 · RA확정 · 백오피스</a:t>
+                  <a:srgbClr val="0F2942"/>
+                </a:solidFill>
+                <a:latin typeface="Malgun Gothic"/>
+              </a:rPr>
+              <a:t>BO➔Agent 호출 · 상충탐지 · QA확정 · 백오피스</a:t>
             </a:r>
           </a:p>
         </p:txBody>
@@ -32110,7 +32110,7 @@
                 </a:solidFill>
                 <a:latin typeface="Malgun Gothic"/>
               </a:rPr>
-              <a:t>마케팅허브 전용 ALB 인바운드 · 결과 웹훅 회신</a:t>
+              <a:t>전자구매포털 전용 ALB 인바운드 · 결과 웹훅 회신</a:t>
             </a:r>
             <a:endParaRPr b="0" i="0" sz="1400" u="none" cap="none" strike="noStrike">
               <a:solidFill>
@@ -32127,7 +32127,7 @@
             <a:r>
               <a:rPr sz="530" b="0">
                 <a:solidFill>
-                  <a:srgbClr val="1E293B"/>
+                  <a:srgbClr val="0F2942"/>
                 </a:solidFill>
                 <a:latin typeface="Malgun Gothic"/>
               </a:rPr>
@@ -32449,7 +32449,7 @@
                 </a:solidFill>
                 <a:latin typeface="Malgun Gothic"/>
               </a:rPr>
-              <a:t>OpenCV 피크프레임 1차 자동추출 + 웹 보정장면 분석</a:t>
+              <a:t>OpenCV 도면스냅샷 1차 자동추출 + 웹 보정장면 분석</a:t>
             </a:r>
             <a:endParaRPr b="0" i="0" sz="1400" u="none" cap="none" strike="noStrike">
               <a:solidFill>
@@ -32466,11 +32466,11 @@
             <a:r>
               <a:rPr sz="530" b="0">
                 <a:solidFill>
-                  <a:srgbClr val="1E293B"/>
-                </a:solidFill>
-                <a:latin typeface="Malgun Gothic"/>
-              </a:rPr>
-              <a:t>네이버/패들 OCR · 동시 4건 세마포어 + QUEUED</a:t>
+                  <a:srgbClr val="0F2942"/>
+                </a:solidFill>
+                <a:latin typeface="Malgun Gothic"/>
+              </a:rPr>
+              <a:t>엔터프라이즈 멀티모달 OCR · 동시 4건 세마포어 + QUEUED</a:t>
             </a:r>
           </a:p>
         </p:txBody>
@@ -32791,7 +32791,7 @@
                 <a:cs typeface="Malgun Gothic"/>
                 <a:sym typeface="Malgun Gothic"/>
               </a:rPr>
-              <a:t>매일 02:00 ProductLab 전성분·실증</a:t>
+              <a:t>매일 02:00 PLM-Nexus 자재BOM·시험검증</a:t>
             </a:r>
             <a:endParaRPr b="0" i="0" sz="1400" u="none" cap="none" strike="noStrike">
               <a:solidFill>
@@ -32831,7 +32831,7 @@
                 <a:cs typeface="Malgun Gothic"/>
                 <a:sym typeface="Malgun Gothic"/>
               </a:rPr>
-              <a:t>02:30 KT레몬 · 법령 Diff 벡터화</a:t>
+              <a:t>02:30 HB-Monitor · 법령 Diff 벡터화</a:t>
             </a:r>
             <a:endParaRPr b="0" i="0" sz="1400" u="none" cap="none" strike="noStrike">
               <a:solidFill>
@@ -33233,14 +33233,14 @@
             <a:r>
               <a:rPr b="1" i="0" lang="en-US" sz="630" u="none" cap="none" strike="noStrike">
                 <a:solidFill>
-                  <a:srgbClr val="1E293B"/>
+                  <a:srgbClr val="0F2942"/>
                 </a:solidFill>
                 <a:latin typeface="Malgun Gothic"/>
                 <a:ea typeface="Malgun Gothic"/>
                 <a:cs typeface="Malgun Gothic"/>
                 <a:sym typeface="Malgun Gothic"/>
               </a:rPr>
-              <a:t>hb_syncguard_ai (:5432)</a:t>
+              <a:t>hb_syncflow_ai (:5432)</a:t>
             </a:r>
             <a:endParaRPr b="0" i="0" sz="1400" u="none" cap="none" strike="noStrike">
               <a:solidFill>
@@ -33320,7 +33320,7 @@
             <a:r>
               <a:rPr sz="620" b="0">
                 <a:solidFill>
-                  <a:srgbClr val="1E293B"/>
+                  <a:srgbClr val="0F2942"/>
                 </a:solidFill>
                 <a:latin typeface="Malgun Gothic"/>
               </a:rPr>
@@ -33332,7 +33332,7 @@
             <a:r>
               <a:rPr sz="620" b="0">
                 <a:solidFill>
-                  <a:srgbClr val="1E293B"/>
+                  <a:srgbClr val="0F2942"/>
                 </a:solidFill>
                 <a:latin typeface="Malgun Gothic"/>
               </a:rPr>
@@ -33528,7 +33528,7 @@
             <a:r>
               <a:rPr b="1" i="0" lang="en-US" sz="610" u="none" cap="none" strike="noStrike">
                 <a:solidFill>
-                  <a:srgbClr val="1E293B"/>
+                  <a:srgbClr val="0F2942"/>
                 </a:solidFill>
                 <a:latin typeface="Malgun Gothic"/>
                 <a:ea typeface="Malgun Gothic"/>
@@ -33797,11 +33797,11 @@
             <a:r>
               <a:rPr sz="610" b="0">
                 <a:solidFill>
-                  <a:srgbClr val="1E293B"/>
-                </a:solidFill>
-                <a:latin typeface="Malgun Gothic"/>
-              </a:rPr>
-              <a:t>300MB 시안·영상 · AI 추출 및 웹 보정 장면 · 리포트</a:t>
+                  <a:srgbClr val="0F2942"/>
+                </a:solidFill>
+                <a:latin typeface="Malgun Gothic"/>
+              </a:rPr>
+              <a:t>300MB 계약·도서·영상 · AI 추출 및 웹 보정 장면 · 리포트</a:t>
             </a:r>
           </a:p>
         </p:txBody>
@@ -34365,7 +34365,7 @@
                 </a:solidFill>
                 <a:latin typeface="Malgun Gothic"/>
               </a:rPr>
-              <a:t>네이버OCR(*.apigw.ntruss.com) · LLM · 마케팅허브 방화벽 오픈</a:t>
+              <a:t>비전OCR(ocr-api.hanbitglobal.internal) · LLM · 전자구매포털 방화벽 오픈</a:t>
             </a:r>
             <a:endParaRPr b="0" i="0" sz="1400" u="none" cap="none" strike="noStrike">
               <a:solidFill>
@@ -34641,11 +34641,11 @@
             <a:r>
               <a:rPr sz="620" b="1">
                 <a:solidFill>
-                  <a:srgbClr val="1E293B"/>
-                </a:solidFill>
-                <a:latin typeface="Malgun Gothic"/>
-              </a:rPr>
-              <a:t>레포지토리명: syncguard-ai</a:t>
+                  <a:srgbClr val="0F2942"/>
+                </a:solidFill>
+                <a:latin typeface="Malgun Gothic"/>
+              </a:rPr>
+              <a:t>레포지토리명: syncflow-ai</a:t>
             </a:r>
             <a:endParaRPr b="0" i="0" sz="1400" u="none" cap="none" strike="noStrike">
               <a:solidFill>
@@ -34858,7 +34858,7 @@
             <a:r>
               <a:rPr sz="620" b="1">
                 <a:solidFill>
-                  <a:srgbClr val="1E293B"/>
+                  <a:srgbClr val="0F2942"/>
                 </a:solidFill>
                 <a:latin typeface="Malgun Gothic"/>
               </a:rPr>
@@ -35413,7 +35413,7 @@
                 </a:solidFill>
                 <a:latin typeface="Malgun Gothic"/>
               </a:rPr>
-              <a:t>★ 연계: syncguard-ai-api-prv-alb</a:t>
+              <a:t>★ 연계: syncflow-ai-api-prv-alb</a:t>
             </a:r>
             <a:endParaRPr b="0" i="0" sz="1400" u="none" cap="none" strike="noStrike">
               <a:solidFill>
@@ -35476,7 +35476,7 @@
                 </a:solidFill>
                 <a:latin typeface="Malgun Gothic"/>
               </a:rPr>
-              <a:t>[대외연계 ALB] 마케팅허브만 오픈(:443)</a:t>
+              <a:t>[대외연계 ALB] 전자구매포털만 오픈(:443)</a:t>
             </a:r>
             <a:endParaRPr b="0" i="0" sz="1400" u="none" cap="none" strike="noStrike">
               <a:solidFill>
@@ -35535,7 +35535,7 @@
             <a:r>
               <a:rPr sz="640" b="0">
                 <a:solidFill>
-                  <a:srgbClr val="1E293B"/>
+                  <a:srgbClr val="0F2942"/>
                 </a:solidFill>
                 <a:latin typeface="Malgun Gothic"/>
               </a:rPr>
@@ -36077,7 +36077,7 @@
                 <a:cs typeface="Malgun Gothic"/>
                 <a:sym typeface="Malgun Gothic"/>
               </a:rPr>
-              <a:t>• GitLab 저장소(syncguard-ai) + ArgoCD / CodeDeploy 컨테이너 자동 배포</a:t>
+              <a:t>• GitLab 저장소(syncflow-ai) + ArgoCD / CodeDeploy 컨테이너 자동 배포</a:t>
             </a:r>
             <a:endParaRPr b="0" i="0" sz="1400" u="none" cap="none" strike="noStrike">
               <a:solidFill>
@@ -36357,7 +36357,7 @@
                 </a:solidFill>
                 <a:latin typeface="Malgun Gothic"/>
               </a:rPr>
-              <a:t>• 마케팅허브(MarketingHub): 대외연계 전용 ALB(마케팅허브만 오픈) 경유 의뢰 수신 및 결과(HTML/JSON) 콜백 연동</a:t>
+              <a:t>• 전자구매포털(SRM-Portal): 대외연계 전용 ALB(전자구매포털만 오픈) 경유 의뢰 수신 및 결과(HTML/JSON) 콜백 연동</a:t>
             </a:r>
             <a:endParaRPr b="0" i="0" sz="1400" u="none" cap="none" strike="noStrike">
               <a:solidFill>
@@ -36378,7 +36378,7 @@
                 </a:solidFill>
                 <a:latin typeface="Malgun Gothic"/>
               </a:rPr>
-              <a:t>• 프로덕트랩(ProductLab): 매일 새벽 02:00 일배치(Batch :18084) 전성분·처방·임상보고서 수집</a:t>
+              <a:t>• 피엘엠넥서스(PLM-Nexus): 매일 새벽 02:00 일배치(Batch :18084) 자재BOM·설계사양·신뢰성보고서 수집</a:t>
             </a:r>
           </a:p>
           <a:p>
@@ -36518,7 +36518,7 @@
                 <a:cs typeface="Malgun Gothic"/>
                 <a:sym typeface="Malgun Gothic"/>
               </a:rPr>
-              <a:t>대외 AI Gateway / LLM · 네이버 OCR 연동</a:t>
+              <a:t>대외 AI Gateway / LLM · 엔터프라이즈 비전 OCR 연동</a:t>
             </a:r>
             <a:endParaRPr b="0" i="0" sz="1400" u="none" cap="none" strike="noStrike">
               <a:solidFill>
@@ -36598,11 +36598,11 @@
             <a:r>
               <a:rPr sz="740" b="0">
                 <a:solidFill>
-                  <a:srgbClr val="1E293B"/>
-                </a:solidFill>
-                <a:latin typeface="Malgun Gothic"/>
-              </a:rPr>
-              <a:t>• 네이버 클로바 OCR: *.apigw.ntruss.com (연구소 계약)</a:t>
+                  <a:srgbClr val="0F2942"/>
+                </a:solidFill>
+                <a:latin typeface="Malgun Gothic"/>
+              </a:rPr>
+              <a:t>• 엔터프라이즈 비전 OCR: ocr-api.hanbitglobal.internal (연구소 계약)</a:t>
             </a:r>
           </a:p>
           <a:p>
@@ -36610,7 +36610,7 @@
             <a:r>
               <a:rPr sz="740" b="0">
                 <a:solidFill>
-                  <a:srgbClr val="1E293B"/>
+                  <a:srgbClr val="0F2942"/>
                 </a:solidFill>
                 <a:latin typeface="Malgun Gothic"/>
               </a:rPr>
@@ -36956,11 +36956,11 @@
             <a:r>
               <a:rPr sz="730" b="0">
                 <a:solidFill>
-                  <a:srgbClr val="1E293B"/>
-                </a:solidFill>
-                <a:latin typeface="Malgun Gothic"/>
-              </a:rPr>
-              <a:t>  - BO ALB (syncguard-ai-bo-prv-alb): 사용자대역 오픈</a:t>
+                  <a:srgbClr val="0F2942"/>
+                </a:solidFill>
+                <a:latin typeface="Malgun Gothic"/>
+              </a:rPr>
+              <a:t>  - BO ALB (syncflow-ai-bo-prv-alb): 사용자대역 오픈</a:t>
             </a:r>
           </a:p>
           <a:p>
@@ -36968,11 +36968,11 @@
             <a:r>
               <a:rPr sz="730" b="0">
                 <a:solidFill>
-                  <a:srgbClr val="1E293B"/>
-                </a:solidFill>
-                <a:latin typeface="Malgun Gothic"/>
-              </a:rPr>
-              <a:t>    ➔ 통합웹(:3104) · 업무BE(:18080) [claim.hanbitglobal.com]</a:t>
+                  <a:srgbClr val="0F2942"/>
+                </a:solidFill>
+                <a:latin typeface="Malgun Gothic"/>
+              </a:rPr>
+              <a:t>    ➔ 통합웹(:3104) · 업무BE(:18080) [Spec.hanbitglobal.com]</a:t>
             </a:r>
           </a:p>
           <a:p>
@@ -36980,11 +36980,11 @@
             <a:r>
               <a:rPr sz="730" b="0">
                 <a:solidFill>
-                  <a:srgbClr val="1E293B"/>
-                </a:solidFill>
-                <a:latin typeface="Malgun Gothic"/>
-              </a:rPr>
-              <a:t>  - 대외연계 ALB (syncguard-ai-api-prv-alb): 마케팅허브만 오픈</a:t>
+                  <a:srgbClr val="0F2942"/>
+                </a:solidFill>
+                <a:latin typeface="Malgun Gothic"/>
+              </a:rPr>
+              <a:t>  - 대외연계 ALB (syncflow-ai-api-prv-alb): 전자구매포털만 오픈</a:t>
             </a:r>
           </a:p>
           <a:p>
@@ -36992,11 +36992,11 @@
             <a:r>
               <a:rPr sz="730" b="0">
                 <a:solidFill>
-                  <a:srgbClr val="1E293B"/>
-                </a:solidFill>
-                <a:latin typeface="Malgun Gothic"/>
-              </a:rPr>
-              <a:t>    ➔ 대외연계 API(:18085) [syncguard-api.hanbitglobal.com]</a:t>
+                  <a:srgbClr val="0F2942"/>
+                </a:solidFill>
+                <a:latin typeface="Malgun Gothic"/>
+              </a:rPr>
+              <a:t>    ➔ 대외연계 API(:18085) [syncflow-api.hanbitglobal.com]</a:t>
             </a:r>
           </a:p>
         </p:txBody>
@@ -37204,7 +37204,7 @@
             <a:r>
               <a:rPr sz="730" b="0">
                 <a:solidFill>
-                  <a:srgbClr val="1E293B"/>
+                  <a:srgbClr val="0F2942"/>
                 </a:solidFill>
                 <a:latin typeface="Malgun Gothic"/>
               </a:rPr>
@@ -37216,7 +37216,7 @@
             <a:r>
               <a:rPr sz="730" b="0">
                 <a:solidFill>
-                  <a:srgbClr val="1E293B"/>
+                  <a:srgbClr val="0F2942"/>
                 </a:solidFill>
                 <a:latin typeface="Malgun Gothic"/>
               </a:rPr>
@@ -37228,7 +37228,7 @@
             <a:r>
               <a:rPr sz="730" b="0">
                 <a:solidFill>
-                  <a:srgbClr val="1E293B"/>
+                  <a:srgbClr val="0F2942"/>
                 </a:solidFill>
                 <a:latin typeface="Malgun Gothic"/>
               </a:rPr>
@@ -37240,7 +37240,7 @@
             <a:r>
               <a:rPr sz="730" b="0">
                 <a:solidFill>
-                  <a:srgbClr val="1E293B"/>
+                  <a:srgbClr val="0F2942"/>
                 </a:solidFill>
                 <a:latin typeface="Malgun Gothic"/>
               </a:rPr>
@@ -37252,7 +37252,7 @@
             <a:r>
               <a:rPr sz="730" b="0">
                 <a:solidFill>
-                  <a:srgbClr val="1E293B"/>
+                  <a:srgbClr val="0F2942"/>
                 </a:solidFill>
                 <a:latin typeface="Malgun Gothic"/>
               </a:rPr>
@@ -37457,7 +37457,7 @@
                 </a:solidFill>
                 <a:latin typeface="Malgun Gothic"/>
               </a:rPr>
-              <a:t>AP 기본 제공 스펙 우선 구성 (성능테스트 시 OOM 등 서비스 중단 반복 시 스펙 증설 요청) · PRD / STG / DEV</a:t>
+              <a:t>HB 표준 제공 스펙 우선 구성 (성능테스트 시 OOM 등 서비스 중단 반복 시 스펙 증설 요청) · PRD / STG / DEV</a:t>
             </a:r>
             <a:endParaRPr b="0" i="0" sz="1400" u="none" cap="none" strike="noStrike">
               <a:solidFill>
@@ -37547,11 +37547,11 @@
             <a:r>
               <a:rPr sz="660" b="0">
                 <a:solidFill>
-                  <a:srgbClr val="1E293B"/>
-                </a:solidFill>
-                <a:latin typeface="Malgun Gothic"/>
-              </a:rPr>
-              <a:t>• 영상 장면 보정: AI 1차 추출 후 웹 화면에서 동영상 재생·특정화면 멈춰 장면 추가 및 AI 생성 장면 편집·삭제</a:t>
+                  <a:srgbClr val="0F2942"/>
+                </a:solidFill>
+                <a:latin typeface="Malgun Gothic"/>
+              </a:rPr>
+              <a:t>• 영상 장면 보정: AI 1차 추출 후 웹 화면에서 설계도면 재생·특정화면 멈춰 장면 추가 및 AI 생성 장면 편집·삭제</a:t>
             </a:r>
           </a:p>
           <a:p>
@@ -37559,7 +37559,7 @@
             <a:r>
               <a:rPr sz="660" b="0">
                 <a:solidFill>
-                  <a:srgbClr val="1E293B"/>
+                  <a:srgbClr val="0F2942"/>
                 </a:solidFill>
                 <a:latin typeface="Malgun Gothic"/>
               </a:rPr>
@@ -37644,11 +37644,11 @@
             <a:r>
               <a:rPr sz="660" b="0">
                 <a:solidFill>
-                  <a:srgbClr val="1E293B"/>
-                </a:solidFill>
-                <a:latin typeface="Malgun Gothic"/>
-              </a:rPr>
-              <a:t>• 접근 통제: 마케팅허브 서버만 오픈된 대외연계 ALB를 통해서만 인바운드 접근 허용 (일반 사용자대역 접근 차단)</a:t>
+                  <a:srgbClr val="0F2942"/>
+                </a:solidFill>
+                <a:latin typeface="Malgun Gothic"/>
+              </a:rPr>
+              <a:t>• 접근 통제: 전자구매포털 서버만 오픈된 대외연계 ALB를 통해서만 인바운드 접근 허용 (일반 사용자대역 접근 차단)</a:t>
             </a:r>
           </a:p>
           <a:p>
@@ -37656,11 +37656,11 @@
             <a:r>
               <a:rPr sz="660" b="0">
                 <a:solidFill>
-                  <a:srgbClr val="1E293B"/>
-                </a:solidFill>
-                <a:latin typeface="Malgun Gothic"/>
-              </a:rPr>
-              <a:t>• 대용량 처리: 300MB 시안·동영상 S3(Intelligent-Tiering) 업로드 및 EKS Service를 통한 AI Agent(:18083) 호출</a:t>
+                  <a:srgbClr val="0F2942"/>
+                </a:solidFill>
+                <a:latin typeface="Malgun Gothic"/>
+              </a:rPr>
+              <a:t>• 대용량 처리: 300MB 계약·도서·설계도면 S3(Intelligent-Tiering) 업로드 및 EKS Service를 통한 AI Agent(:18083) 호출</a:t>
             </a:r>
           </a:p>
         </p:txBody>
@@ -37724,7 +37724,7 @@
                 </a:solidFill>
                 <a:latin typeface="Malgun Gothic"/>
               </a:rPr>
-              <a:t>★ 모듈 #4·#5 : AI 에이전트(:18083) &amp; 배치 워커(:18084) [AP 기본 제공 타입 적용]</a:t>
+              <a:t>★ 모듈 #4·#5 : AI 에이전트(:18083) &amp; 배치 워커(:18084) [HB 표준 제공 타입 적용]</a:t>
             </a:r>
             <a:endParaRPr b="0" i="0" sz="1400" u="none" cap="none" strike="noStrike">
               <a:solidFill>
@@ -37741,11 +37741,11 @@
             <a:r>
               <a:rPr sz="660" b="0">
                 <a:solidFill>
-                  <a:srgbClr val="1E293B"/>
-                </a:solidFill>
-                <a:latin typeface="Malgun Gothic"/>
-              </a:rPr>
-              <a:t>• AI Agent(:18083): OpenCV 영상 피크프레임 1차 자동추출 + 웹 보정 장면 분석, 네이버/패들 OCR, 동시 4건 큐, 1536d RAG</a:t>
+                  <a:srgbClr val="0F2942"/>
+                </a:solidFill>
+                <a:latin typeface="Malgun Gothic"/>
+              </a:rPr>
+              <a:t>• AI Agent(:18083): OpenCV 영상 도면스냅샷 1차 자동추출 + 웹 보정 장면 분석, 엔터프라이즈 멀티모달 OCR, 동시 4건 큐, 1536d RAG</a:t>
             </a:r>
           </a:p>
           <a:p>
@@ -37753,11 +37753,11 @@
             <a:r>
               <a:rPr sz="660" b="0">
                 <a:solidFill>
-                  <a:srgbClr val="1E293B"/>
-                </a:solidFill>
-                <a:latin typeface="Malgun Gothic"/>
-              </a:rPr>
-              <a:t>• 스펙 원칙: AP 기본 제공 타입으로 구성하며, 성능 테스트 시 OOM 등 서비스 중단 이슈 반복 시 스펙 증설 요청</a:t>
+                  <a:srgbClr val="0F2942"/>
+                </a:solidFill>
+                <a:latin typeface="Malgun Gothic"/>
+              </a:rPr>
+              <a:t>• 스펙 원칙: HB 표준 제공 타입으로 구성하며, 성능 테스트 시 OOM 등 서비스 중단 이슈 반복 시 스펙 증설 요청</a:t>
             </a:r>
           </a:p>
         </p:txBody>
@@ -37857,20 +37857,20 @@
             <a:r>
               <a:rPr b="0" i="0" lang="en-US" sz="660" u="none" cap="none" strike="noStrike">
                 <a:solidFill>
-                  <a:srgbClr val="1E293B"/>
+                  <a:srgbClr val="0F2942"/>
                 </a:solidFill>
                 <a:latin typeface="Malgun Gothic"/>
                 <a:ea typeface="Malgun Gothic"/>
                 <a:cs typeface="Malgun Gothic"/>
                 <a:sym typeface="Malgun Gothic"/>
               </a:rPr>
-              <a:t>• 스테이지(STG): syncguard-ai-stg 네임스페이스 — 현업 UAT 및 마케팅허브·프로덕트랩 검증계 통합 테스트
-• 개발(DEV): syncguard-ai-dev 네임스페이스 — 5대 모듈(통합웹·업무BE·연계API·에이전트·배치) 개발계 컨테이너 구동</a:t>
+              <a:t>• 스테이지(STG): syncflow-ai-stg 네임스페이스 — 현업 UAT 및 전자구매포털·피엘엠넥서스 검증계 통합 테스트
+• 개발(DEV): syncflow-ai-dev 네임스페이스 — 5대 모듈(통합웹·업무BE·연계API·에이전트·배치) 개발계 컨테이너 구동</a:t>
             </a:r>
             <a:br>
               <a:rPr b="0" i="0" lang="en-US" sz="680" u="none" cap="none" strike="noStrike">
                 <a:solidFill>
-                  <a:srgbClr val="1E293B"/>
+                  <a:srgbClr val="0F2942"/>
                 </a:solidFill>
                 <a:latin typeface="Malgun Gothic"/>
                 <a:ea typeface="Malgun Gothic"/>
@@ -37881,7 +37881,7 @@
             <a:r>
               <a:rPr b="0" i="0" lang="en-US" sz="680" u="none" cap="none" strike="noStrike">
                 <a:solidFill>
-                  <a:srgbClr val="1E293B"/>
+                  <a:srgbClr val="0F2942"/>
                 </a:solidFill>
                 <a:latin typeface="Malgun Gothic"/>
                 <a:ea typeface="Malgun Gothic"/>
@@ -38115,7 +38115,7 @@
             <a:r>
               <a:rPr sz="690" b="0">
                 <a:solidFill>
-                  <a:srgbClr val="1E293B"/>
+                  <a:srgbClr val="0F2942"/>
                 </a:solidFill>
                 <a:latin typeface="Malgun Gothic"/>
               </a:rPr>
@@ -38127,7 +38127,7 @@
             <a:r>
               <a:rPr sz="690" b="0">
                 <a:solidFill>
-                  <a:srgbClr val="1E293B"/>
+                  <a:srgbClr val="0F2942"/>
                 </a:solidFill>
                 <a:latin typeface="Malgun Gothic"/>
               </a:rPr>
@@ -38139,7 +38139,7 @@
             <a:r>
               <a:rPr sz="690" b="0">
                 <a:solidFill>
-                  <a:srgbClr val="1E293B"/>
+                  <a:srgbClr val="0F2942"/>
                 </a:solidFill>
                 <a:latin typeface="Malgun Gothic"/>
               </a:rPr>
@@ -38151,7 +38151,7 @@
             <a:r>
               <a:rPr sz="690" b="0">
                 <a:solidFill>
-                  <a:srgbClr val="1E293B"/>
+                  <a:srgbClr val="0F2942"/>
                 </a:solidFill>
                 <a:latin typeface="Malgun Gothic"/>
               </a:rPr>
@@ -38163,7 +38163,7 @@
             <a:r>
               <a:rPr sz="690" b="0">
                 <a:solidFill>
-                  <a:srgbClr val="1E293B"/>
+                  <a:srgbClr val="0F2942"/>
                 </a:solidFill>
                 <a:latin typeface="Malgun Gothic"/>
               </a:rPr>
@@ -38248,11 +38248,11 @@
             <a:r>
               <a:rPr sz="690" b="0">
                 <a:solidFill>
-                  <a:srgbClr val="1E293B"/>
-                </a:solidFill>
-                <a:latin typeface="Malgun Gothic"/>
-              </a:rPr>
-              <a:t>• 환경별 버킷: ap-syncguard-ai-prd / stg / dev (SSE-S3 암호화)</a:t>
+                  <a:srgbClr val="0F2942"/>
+                </a:solidFill>
+                <a:latin typeface="Malgun Gothic"/>
+              </a:rPr>
+              <a:t>• 환경별 버킷: ap-syncflow-ai-prd / stg / dev (SSE-S3 암호화)</a:t>
             </a:r>
           </a:p>
           <a:p>
@@ -38260,7 +38260,7 @@
             <a:r>
               <a:rPr sz="690" b="0">
                 <a:solidFill>
-                  <a:srgbClr val="1E293B"/>
+                  <a:srgbClr val="0F2942"/>
                 </a:solidFill>
                 <a:latin typeface="Malgun Gothic"/>
               </a:rPr>
@@ -38272,7 +38272,7 @@
             <a:r>
               <a:rPr sz="690" b="0">
                 <a:solidFill>
-                  <a:srgbClr val="1E293B"/>
+                  <a:srgbClr val="0F2942"/>
                 </a:solidFill>
                 <a:latin typeface="Malgun Gothic"/>
               </a:rPr>
@@ -38284,11 +38284,11 @@
             <a:r>
               <a:rPr sz="690" b="0">
                 <a:solidFill>
-                  <a:srgbClr val="1E293B"/>
-                </a:solidFill>
-                <a:latin typeface="Malgun Gothic"/>
-              </a:rPr>
-              <a:t>• 용도: 시안·영상 원본, AI 추출 및 웹 보정 장면, 리포트</a:t>
+                  <a:srgbClr val="0F2942"/>
+                </a:solidFill>
+                <a:latin typeface="Malgun Gothic"/>
+              </a:rPr>
+              <a:t>• 용도: 계약·도서·영상 원본, AI 추출 및 웹 보정 장면, 리포트</a:t>
             </a:r>
           </a:p>
         </p:txBody>
@@ -38433,7 +38433,7 @@
                 </a:solidFill>
                 <a:latin typeface="Malgun Gothic"/>
               </a:rPr>
-              <a:t>BO/대외연계 ALB 물리 분리 · AP 기본 제공 스펙 적용(성능테스트 OOM 시 증설) · S3 Intelligent-Tiering · 네이버OCR 및 Outbound URL 방화벽 명세</a:t>
+              <a:t>BO/대외연계 ALB 물리 분리 · HB 표준 제공 스펙 적용(성능테스트 OOM 시 증설) · S3 Intelligent-Tiering · 비전OCR 및 Outbound URL 방화벽 명세</a:t>
             </a:r>
             <a:endParaRPr b="0" i="0" sz="1400" u="none" cap="none" strike="noStrike">
               <a:solidFill>
@@ -38872,7 +38872,7 @@
                       <a:r>
                         <a:rPr sz="660" b="1">
                           <a:solidFill>
-                            <a:srgbClr val="1E293B"/>
+                            <a:srgbClr val="0F2942"/>
                           </a:solidFill>
                           <a:latin typeface="Malgun Gothic"/>
                         </a:rPr>
@@ -38912,11 +38912,11 @@
                       <a:r>
                         <a:rPr sz="660" b="1">
                           <a:solidFill>
-                            <a:srgbClr val="1E293B"/>
+                            <a:srgbClr val="0F2942"/>
                           </a:solidFill>
                           <a:latin typeface="Malgun Gothic"/>
                         </a:rPr>
-                        <a:t>① BO ALB (syncguard-ai-bo-prv-alb)</a:t>
+                        <a:t>① BO ALB (syncflow-ai-bo-prv-alb)</a:t>
                       </a:r>
                       <a:endParaRPr sz="1400" u="none" cap="none" strike="noStrike"/>
                     </a:p>
@@ -38925,11 +38925,11 @@
                       <a:r>
                         <a:rPr sz="660" b="1">
                           <a:solidFill>
-                            <a:srgbClr val="1E293B"/>
+                            <a:srgbClr val="0F2942"/>
                           </a:solidFill>
                           <a:latin typeface="Malgun Gothic"/>
                         </a:rPr>
-                        <a:t>② 연계 ALB (syncguard-ai-api-prv-alb)</a:t>
+                        <a:t>② 연계 ALB (syncflow-ai-api-prv-alb)</a:t>
                       </a:r>
                     </a:p>
                   </a:txBody>
@@ -38964,7 +38964,7 @@
                       <a:r>
                         <a:rPr sz="660" b="0">
                           <a:solidFill>
-                            <a:srgbClr val="1E293B"/>
+                            <a:srgbClr val="0F2942"/>
                           </a:solidFill>
                           <a:latin typeface="Malgun Gothic"/>
                         </a:rPr>
@@ -38977,7 +38977,7 @@
                       <a:r>
                         <a:rPr sz="660" b="0">
                           <a:solidFill>
-                            <a:srgbClr val="1E293B"/>
+                            <a:srgbClr val="0F2942"/>
                           </a:solidFill>
                           <a:latin typeface="Malgun Gothic"/>
                         </a:rPr>
@@ -39016,7 +39016,7 @@
                       <a:r>
                         <a:rPr sz="660" b="0">
                           <a:solidFill>
-                            <a:srgbClr val="1E293B"/>
+                            <a:srgbClr val="0F2942"/>
                           </a:solidFill>
                           <a:latin typeface="Malgun Gothic"/>
                         </a:rPr>
@@ -39056,7 +39056,7 @@
                       <a:r>
                         <a:rPr sz="660" b="0">
                           <a:solidFill>
-                            <a:srgbClr val="1E293B"/>
+                            <a:srgbClr val="0F2942"/>
                           </a:solidFill>
                           <a:latin typeface="Malgun Gothic"/>
                         </a:rPr>
@@ -39096,7 +39096,7 @@
                       <a:r>
                         <a:rPr sz="660" b="0">
                           <a:solidFill>
-                            <a:srgbClr val="1E293B"/>
+                            <a:srgbClr val="0F2942"/>
                           </a:solidFill>
                           <a:latin typeface="Malgun Gothic"/>
                         </a:rPr>
@@ -39136,11 +39136,11 @@
                       <a:r>
                         <a:rPr sz="660" b="0">
                           <a:solidFill>
-                            <a:srgbClr val="1E293B"/>
+                            <a:srgbClr val="0F2942"/>
                           </a:solidFill>
                           <a:latin typeface="Malgun Gothic"/>
                         </a:rPr>
-                        <a:t>[물리 분리] BO ALB: 사용자대역 오픈(통합웹 :3104 / 업무BE :18080) | 대외연계 ALB: 마케팅허브 서버만 오픈(대외API :18085)</a:t>
+                        <a:t>[물리 분리] BO ALB: 사용자대역 오픈(통합웹 :3104 / 업무BE :18080) | 대외연계 ALB: 전자구매포털 서버만 오픈(대외API :18085)</a:t>
                       </a:r>
                       <a:endParaRPr sz="1400" u="none" cap="none" strike="noStrike"/>
                     </a:p>
@@ -39178,7 +39178,7 @@
                       <a:r>
                         <a:rPr sz="660" b="1">
                           <a:solidFill>
-                            <a:srgbClr val="1E293B"/>
+                            <a:srgbClr val="0F2942"/>
                           </a:solidFill>
                           <a:latin typeface="Malgun Gothic"/>
                         </a:rPr>
@@ -39218,7 +39218,7 @@
                       <a:r>
                         <a:rPr sz="660" b="1">
                           <a:solidFill>
-                            <a:srgbClr val="1E293B"/>
+                            <a:srgbClr val="0F2942"/>
                           </a:solidFill>
                           <a:latin typeface="Malgun Gothic"/>
                         </a:rPr>
@@ -39258,11 +39258,11 @@
                       <a:r>
                         <a:rPr sz="660" b="0">
                           <a:solidFill>
-                            <a:srgbClr val="1E293B"/>
+                            <a:srgbClr val="0F2942"/>
                           </a:solidFill>
                           <a:latin typeface="Malgun Gothic"/>
                         </a:rPr>
-                        <a:t>AP 기본 제공 타입 (Pod × 2)</a:t>
+                        <a:t>HB 표준 제공 타입 (Pod × 2)</a:t>
                       </a:r>
                       <a:endParaRPr sz="1400" u="none" cap="none" strike="noStrike"/>
                     </a:p>
@@ -39271,7 +39271,7 @@
                       <a:r>
                         <a:rPr sz="660" b="0">
                           <a:solidFill>
-                            <a:srgbClr val="1E293B"/>
+                            <a:srgbClr val="0F2942"/>
                           </a:solidFill>
                           <a:latin typeface="Malgun Gothic"/>
                         </a:rPr>
@@ -39310,11 +39310,11 @@
                       <a:r>
                         <a:rPr sz="660" b="0">
                           <a:solidFill>
-                            <a:srgbClr val="1E293B"/>
+                            <a:srgbClr val="0F2942"/>
                           </a:solidFill>
                           <a:latin typeface="Malgun Gothic"/>
                         </a:rPr>
-                        <a:t>AP 기본 타입 (Pod × 1)</a:t>
+                        <a:t>HB 표준 타입 (Pod × 1)</a:t>
                       </a:r>
                       <a:endParaRPr sz="1400" u="none" cap="none" strike="noStrike"/>
                     </a:p>
@@ -39350,11 +39350,11 @@
                       <a:r>
                         <a:rPr sz="660" b="0">
                           <a:solidFill>
-                            <a:srgbClr val="1E293B"/>
+                            <a:srgbClr val="0F2942"/>
                           </a:solidFill>
                           <a:latin typeface="Malgun Gothic"/>
                         </a:rPr>
-                        <a:t>AP 기본 타입 (Pod × 1)</a:t>
+                        <a:t>HB 표준 타입 (Pod × 1)</a:t>
                       </a:r>
                       <a:endParaRPr sz="1400" u="none" cap="none" strike="noStrike"/>
                     </a:p>
@@ -39390,7 +39390,7 @@
                       <a:r>
                         <a:rPr sz="660" b="0">
                           <a:solidFill>
-                            <a:srgbClr val="1E293B"/>
+                            <a:srgbClr val="0F2942"/>
                           </a:solidFill>
                           <a:latin typeface="Malgun Gothic"/>
                         </a:rPr>
@@ -39430,11 +39430,11 @@
                       <a:r>
                         <a:rPr sz="660" b="0">
                           <a:solidFill>
-                            <a:srgbClr val="1E293B"/>
+                            <a:srgbClr val="0F2942"/>
                           </a:solidFill>
                           <a:latin typeface="Malgun Gothic"/>
                         </a:rPr>
-                        <a:t>BO ALB 연결 · 웹 동영상 재생 및 특정화면 멈춤 장면 추가 / AI 장면 편집·삭제 보정 · EKS Service로 AI Agent(:18083) 호출</a:t>
+                        <a:t>BO ALB 연결 · 웹 설계도면 재생 및 특정화면 멈춤 장면 추가 / AI 장면 편집·삭제 보정 · EKS Service로 AI Agent(:18083) 호출</a:t>
                       </a:r>
                       <a:endParaRPr sz="1400" u="none" cap="none" strike="noStrike"/>
                     </a:p>
@@ -39472,7 +39472,7 @@
                       <a:r>
                         <a:rPr sz="660" b="1">
                           <a:solidFill>
-                            <a:srgbClr val="1E293B"/>
+                            <a:srgbClr val="0F2942"/>
                           </a:solidFill>
                           <a:latin typeface="Malgun Gothic"/>
                         </a:rPr>
@@ -39512,7 +39512,7 @@
                       <a:r>
                         <a:rPr sz="660" b="1">
                           <a:solidFill>
-                            <a:srgbClr val="1E293B"/>
+                            <a:srgbClr val="0F2942"/>
                           </a:solidFill>
                           <a:latin typeface="Malgun Gothic"/>
                         </a:rPr>
@@ -39552,11 +39552,11 @@
                       <a:r>
                         <a:rPr sz="660" b="0">
                           <a:solidFill>
-                            <a:srgbClr val="1E293B"/>
+                            <a:srgbClr val="0F2942"/>
                           </a:solidFill>
                           <a:latin typeface="Malgun Gothic"/>
                         </a:rPr>
-                        <a:t>AP 기본 제공 타입 (Pod × 2)</a:t>
+                        <a:t>HB 표준 제공 타입 (Pod × 2)</a:t>
                       </a:r>
                       <a:endParaRPr sz="1400" u="none" cap="none" strike="noStrike"/>
                     </a:p>
@@ -39565,7 +39565,7 @@
                       <a:r>
                         <a:rPr sz="660" b="0">
                           <a:solidFill>
-                            <a:srgbClr val="1E293B"/>
+                            <a:srgbClr val="0F2942"/>
                           </a:solidFill>
                           <a:latin typeface="Malgun Gothic"/>
                         </a:rPr>
@@ -39604,11 +39604,11 @@
                       <a:r>
                         <a:rPr sz="660" b="0">
                           <a:solidFill>
-                            <a:srgbClr val="1E293B"/>
+                            <a:srgbClr val="0F2942"/>
                           </a:solidFill>
                           <a:latin typeface="Malgun Gothic"/>
                         </a:rPr>
-                        <a:t>AP 기본 타입 (Pod × 1)</a:t>
+                        <a:t>HB 표준 타입 (Pod × 1)</a:t>
                       </a:r>
                       <a:endParaRPr sz="1400" u="none" cap="none" strike="noStrike"/>
                     </a:p>
@@ -39644,11 +39644,11 @@
                       <a:r>
                         <a:rPr sz="660" b="0">
                           <a:solidFill>
-                            <a:srgbClr val="1E293B"/>
+                            <a:srgbClr val="0F2942"/>
                           </a:solidFill>
                           <a:latin typeface="Malgun Gothic"/>
                         </a:rPr>
-                        <a:t>AP 기본 타입 (Pod × 1)</a:t>
+                        <a:t>HB 표준 타입 (Pod × 1)</a:t>
                       </a:r>
                       <a:endParaRPr sz="1400" u="none" cap="none" strike="noStrike"/>
                     </a:p>
@@ -39684,7 +39684,7 @@
                       <a:r>
                         <a:rPr sz="660" b="0">
                           <a:solidFill>
-                            <a:srgbClr val="1E293B"/>
+                            <a:srgbClr val="0F2942"/>
                           </a:solidFill>
                           <a:latin typeface="Malgun Gothic"/>
                         </a:rPr>
@@ -39724,11 +39724,11 @@
                       <a:r>
                         <a:rPr sz="660" b="0">
                           <a:solidFill>
-                            <a:srgbClr val="1E293B"/>
+                            <a:srgbClr val="0F2942"/>
                           </a:solidFill>
                           <a:latin typeface="Malgun Gothic"/>
                         </a:rPr>
-                        <a:t>대외연계 ALB(마케팅허브만 오픈) 연결 · 300MB 시안·영상 S3(Intelligent-Tiering) 업로드 · EKS Service로 AI Agent(:18083) 호출</a:t>
+                        <a:t>대외연계 ALB(전자구매포털만 오픈) 연결 · 300MB 계약·도서·영상 S3(Intelligent-Tiering) 업로드 · EKS Service로 AI Agent(:18083) 호출</a:t>
                       </a:r>
                       <a:endParaRPr sz="1400" u="none" cap="none" strike="noStrike"/>
                     </a:p>
@@ -39766,7 +39766,7 @@
                       <a:r>
                         <a:rPr sz="660" b="1">
                           <a:solidFill>
-                            <a:srgbClr val="1E293B"/>
+                            <a:srgbClr val="0F2942"/>
                           </a:solidFill>
                           <a:latin typeface="Malgun Gothic"/>
                         </a:rPr>
@@ -39806,7 +39806,7 @@
                       <a:r>
                         <a:rPr sz="660" b="1">
                           <a:solidFill>
-                            <a:srgbClr val="1E293B"/>
+                            <a:srgbClr val="0F2942"/>
                           </a:solidFill>
                           <a:latin typeface="Malgun Gothic"/>
                         </a:rPr>
@@ -39846,11 +39846,11 @@
                       <a:r>
                         <a:rPr sz="660" b="0">
                           <a:solidFill>
-                            <a:srgbClr val="1E293B"/>
+                            <a:srgbClr val="0F2942"/>
                           </a:solidFill>
                           <a:latin typeface="Malgun Gothic"/>
                         </a:rPr>
-                        <a:t>AP 기본 제공 타입 (4건 큐)</a:t>
+                        <a:t>HB 표준 제공 타입 (4건 큐)</a:t>
                       </a:r>
                       <a:endParaRPr sz="1400" u="none" cap="none" strike="noStrike"/>
                     </a:p>
@@ -39859,7 +39859,7 @@
                       <a:r>
                         <a:rPr sz="660" b="0">
                           <a:solidFill>
-                            <a:srgbClr val="1E293B"/>
+                            <a:srgbClr val="0F2942"/>
                           </a:solidFill>
                           <a:latin typeface="Malgun Gothic"/>
                         </a:rPr>
@@ -39898,11 +39898,11 @@
                       <a:r>
                         <a:rPr sz="660" b="0">
                           <a:solidFill>
-                            <a:srgbClr val="1E293B"/>
+                            <a:srgbClr val="0F2942"/>
                           </a:solidFill>
                           <a:latin typeface="Malgun Gothic"/>
                         </a:rPr>
-                        <a:t>AP 기본 타입 (Pod × 1)</a:t>
+                        <a:t>HB 표준 타입 (Pod × 1)</a:t>
                       </a:r>
                       <a:endParaRPr sz="1400" u="none" cap="none" strike="noStrike"/>
                     </a:p>
@@ -39938,11 +39938,11 @@
                       <a:r>
                         <a:rPr sz="660" b="0">
                           <a:solidFill>
-                            <a:srgbClr val="1E293B"/>
+                            <a:srgbClr val="0F2942"/>
                           </a:solidFill>
                           <a:latin typeface="Malgun Gothic"/>
                         </a:rPr>
-                        <a:t>AP 기본 타입 (Pod × 1)</a:t>
+                        <a:t>HB 표준 타입 (Pod × 1)</a:t>
                       </a:r>
                       <a:endParaRPr sz="1400" u="none" cap="none" strike="noStrike"/>
                     </a:p>
@@ -39978,7 +39978,7 @@
                       <a:r>
                         <a:rPr sz="660" b="0">
                           <a:solidFill>
-                            <a:srgbClr val="1E293B"/>
+                            <a:srgbClr val="0F2942"/>
                           </a:solidFill>
                           <a:latin typeface="Malgun Gothic"/>
                         </a:rPr>
@@ -40018,11 +40018,11 @@
                       <a:r>
                         <a:rPr sz="660" b="0">
                           <a:solidFill>
-                            <a:srgbClr val="1E293B"/>
+                            <a:srgbClr val="0F2942"/>
                           </a:solidFill>
                           <a:latin typeface="Malgun Gothic"/>
                         </a:rPr>
-                        <a:t>OpenCV 영상 피크프레임 1차 자동추출 + 웹 보정 장면 분석, 네이버/패들 OCR 선택, 동시 4건 세마포어 + QUEUED 워커, 1536d RAG</a:t>
+                        <a:t>OpenCV 영상 도면스냅샷 1차 자동추출 + 웹 보정 장면 분석, 엔터프라이즈 멀티모달 OCR 선택, 동시 4건 세마포어 + QUEUED 워커, 1536d RAG</a:t>
                       </a:r>
                       <a:endParaRPr sz="1400" u="none" cap="none" strike="noStrike"/>
                     </a:p>
@@ -40060,7 +40060,7 @@
                       <a:r>
                         <a:rPr sz="660" b="1">
                           <a:solidFill>
-                            <a:srgbClr val="1E293B"/>
+                            <a:srgbClr val="0F2942"/>
                           </a:solidFill>
                           <a:latin typeface="Malgun Gothic"/>
                         </a:rPr>
@@ -40100,7 +40100,7 @@
                       <a:r>
                         <a:rPr sz="660" b="1">
                           <a:solidFill>
-                            <a:srgbClr val="1E293B"/>
+                            <a:srgbClr val="0F2942"/>
                           </a:solidFill>
                           <a:latin typeface="Malgun Gothic"/>
                         </a:rPr>
@@ -40140,11 +40140,11 @@
                       <a:r>
                         <a:rPr sz="660" b="0">
                           <a:solidFill>
-                            <a:srgbClr val="1E293B"/>
+                            <a:srgbClr val="0F2942"/>
                           </a:solidFill>
                           <a:latin typeface="Malgun Gothic"/>
                         </a:rPr>
-                        <a:t>AP 기본 제공 타입 (Pod × 1)</a:t>
+                        <a:t>HB 표준 제공 타입 (Pod × 1)</a:t>
                       </a:r>
                       <a:endParaRPr sz="1400" u="none" cap="none" strike="noStrike"/>
                     </a:p>
@@ -40153,7 +40153,7 @@
                       <a:r>
                         <a:rPr sz="660" b="0">
                           <a:solidFill>
-                            <a:srgbClr val="1E293B"/>
+                            <a:srgbClr val="0F2942"/>
                           </a:solidFill>
                           <a:latin typeface="Malgun Gothic"/>
                         </a:rPr>
@@ -40192,11 +40192,11 @@
                       <a:r>
                         <a:rPr sz="660" b="0">
                           <a:solidFill>
-                            <a:srgbClr val="1E293B"/>
+                            <a:srgbClr val="0F2942"/>
                           </a:solidFill>
                           <a:latin typeface="Malgun Gothic"/>
                         </a:rPr>
-                        <a:t>AP 기본 타입 (Pod × 1)</a:t>
+                        <a:t>HB 표준 타입 (Pod × 1)</a:t>
                       </a:r>
                       <a:endParaRPr sz="1400" u="none" cap="none" strike="noStrike"/>
                     </a:p>
@@ -40232,11 +40232,11 @@
                       <a:r>
                         <a:rPr sz="660" b="0">
                           <a:solidFill>
-                            <a:srgbClr val="1E293B"/>
+                            <a:srgbClr val="0F2942"/>
                           </a:solidFill>
                           <a:latin typeface="Malgun Gothic"/>
                         </a:rPr>
-                        <a:t>AP 기본 타입 (Pod × 1)</a:t>
+                        <a:t>HB 표준 타입 (Pod × 1)</a:t>
                       </a:r>
                       <a:endParaRPr sz="1400" u="none" cap="none" strike="noStrike"/>
                     </a:p>
@@ -40272,7 +40272,7 @@
                       <a:r>
                         <a:rPr sz="660" b="0">
                           <a:solidFill>
-                            <a:srgbClr val="1E293B"/>
+                            <a:srgbClr val="0F2942"/>
                           </a:solidFill>
                           <a:latin typeface="Malgun Gothic"/>
                         </a:rPr>
@@ -40316,7 +40316,7 @@
                           </a:solidFill>
                           <a:latin typeface="Malgun Gothic"/>
                         </a:rPr>
-                        <a:t>매일 새벽 02:00 ProductLab 전성분·실증 일배치(ProductLabDataSyncBatchJob), 02:30 [Option] KT레몬 배치</a:t>
+                        <a:t>매일 새벽 02:00 PLM-Nexus 자재BOM·시험검증 일배치(plmNexusDataSyncBatchJob), 02:30 [Option] HB-Monitor 배치</a:t>
                       </a:r>
                       <a:endParaRPr sz="1400" u="none" cap="none" strike="noStrike"/>
                     </a:p>
@@ -40354,7 +40354,7 @@
                       <a:r>
                         <a:rPr sz="660" b="1">
                           <a:solidFill>
-                            <a:srgbClr val="1E293B"/>
+                            <a:srgbClr val="0F2942"/>
                           </a:solidFill>
                           <a:latin typeface="Malgun Gothic"/>
                         </a:rPr>
@@ -40394,7 +40394,7 @@
                       <a:r>
                         <a:rPr sz="660" b="1">
                           <a:solidFill>
-                            <a:srgbClr val="1E293B"/>
+                            <a:srgbClr val="0F2942"/>
                           </a:solidFill>
                           <a:latin typeface="Malgun Gothic"/>
                         </a:rPr>
@@ -40434,11 +40434,11 @@
                       <a:r>
                         <a:rPr sz="660" b="0">
                           <a:solidFill>
-                            <a:srgbClr val="1E293B"/>
+                            <a:srgbClr val="0F2942"/>
                           </a:solidFill>
                           <a:latin typeface="Malgun Gothic"/>
                         </a:rPr>
-                        <a:t>AP 기본 제공 타입 (Multi-AZ)</a:t>
+                        <a:t>HB 표준 제공 타입 (Multi-AZ)</a:t>
                       </a:r>
                       <a:endParaRPr sz="1400" u="none" cap="none" strike="noStrike"/>
                     </a:p>
@@ -40447,7 +40447,7 @@
                       <a:r>
                         <a:rPr sz="660" b="0">
                           <a:solidFill>
-                            <a:srgbClr val="1E293B"/>
+                            <a:srgbClr val="0F2942"/>
                           </a:solidFill>
                           <a:latin typeface="Malgun Gothic"/>
                         </a:rPr>
@@ -40486,11 +40486,11 @@
                       <a:r>
                         <a:rPr sz="660" b="0">
                           <a:solidFill>
-                            <a:srgbClr val="1E293B"/>
+                            <a:srgbClr val="0F2942"/>
                           </a:solidFill>
                           <a:latin typeface="Malgun Gothic"/>
                         </a:rPr>
-                        <a:t>AP 기본 타입 (Single-AZ)</a:t>
+                        <a:t>HB 표준 타입 (Single-AZ)</a:t>
                       </a:r>
                       <a:endParaRPr sz="1400" u="none" cap="none" strike="noStrike"/>
                     </a:p>
@@ -40526,11 +40526,11 @@
                       <a:r>
                         <a:rPr sz="660" b="0">
                           <a:solidFill>
-                            <a:srgbClr val="1E293B"/>
+                            <a:srgbClr val="0F2942"/>
                           </a:solidFill>
                           <a:latin typeface="Malgun Gothic"/>
                         </a:rPr>
-                        <a:t>AP 기본 타입 (Single-AZ)</a:t>
+                        <a:t>HB 표준 타입 (Single-AZ)</a:t>
                       </a:r>
                       <a:endParaRPr sz="1400" u="none" cap="none" strike="noStrike"/>
                     </a:p>
@@ -40566,7 +40566,7 @@
                       <a:r>
                         <a:rPr sz="660" b="0">
                           <a:solidFill>
-                            <a:srgbClr val="1E293B"/>
+                            <a:srgbClr val="0F2942"/>
                           </a:solidFill>
                           <a:latin typeface="Malgun Gothic"/>
                         </a:rPr>
@@ -40606,7 +40606,7 @@
                       <a:r>
                         <a:rPr sz="660" b="0">
                           <a:solidFill>
-                            <a:srgbClr val="1E293B"/>
+                            <a:srgbClr val="0F2942"/>
                           </a:solidFill>
                           <a:latin typeface="Malgun Gothic"/>
                         </a:rPr>
@@ -40648,7 +40648,7 @@
                       <a:r>
                         <a:rPr sz="660" b="1">
                           <a:solidFill>
-                            <a:srgbClr val="1E293B"/>
+                            <a:srgbClr val="0F2942"/>
                           </a:solidFill>
                           <a:latin typeface="Malgun Gothic"/>
                         </a:rPr>
@@ -40688,7 +40688,7 @@
                       <a:r>
                         <a:rPr sz="660" b="1">
                           <a:solidFill>
-                            <a:srgbClr val="1E293B"/>
+                            <a:srgbClr val="0F2942"/>
                           </a:solidFill>
                           <a:latin typeface="Malgun Gothic"/>
                         </a:rPr>
@@ -40701,7 +40701,7 @@
                       <a:r>
                         <a:rPr sz="660" b="1">
                           <a:solidFill>
-                            <a:srgbClr val="1E293B"/>
+                            <a:srgbClr val="0F2942"/>
                           </a:solidFill>
                           <a:latin typeface="Malgun Gothic"/>
                         </a:rPr>
@@ -40740,11 +40740,11 @@
                       <a:r>
                         <a:rPr sz="660" b="0">
                           <a:solidFill>
-                            <a:srgbClr val="1E293B"/>
+                            <a:srgbClr val="0F2942"/>
                           </a:solidFill>
                           <a:latin typeface="Malgun Gothic"/>
                         </a:rPr>
-                        <a:t>ap-syncguard-ai-prd</a:t>
+                        <a:t>ap-syncflow-ai-prd</a:t>
                       </a:r>
                       <a:endParaRPr sz="1400" u="none" cap="none" strike="noStrike"/>
                     </a:p>
@@ -40753,7 +40753,7 @@
                       <a:r>
                         <a:rPr sz="660" b="0">
                           <a:solidFill>
-                            <a:srgbClr val="1E293B"/>
+                            <a:srgbClr val="0F2942"/>
                           </a:solidFill>
                           <a:latin typeface="Malgun Gothic"/>
                         </a:rPr>
@@ -40792,11 +40792,11 @@
                       <a:r>
                         <a:rPr sz="660" b="0">
                           <a:solidFill>
-                            <a:srgbClr val="1E293B"/>
+                            <a:srgbClr val="0F2942"/>
                           </a:solidFill>
                           <a:latin typeface="Malgun Gothic"/>
                         </a:rPr>
-                        <a:t>ap-syncguard-ai-stg</a:t>
+                        <a:t>ap-syncflow-ai-stg</a:t>
                       </a:r>
                       <a:endParaRPr sz="1400" u="none" cap="none" strike="noStrike"/>
                     </a:p>
@@ -40805,7 +40805,7 @@
                       <a:r>
                         <a:rPr sz="660" b="0">
                           <a:solidFill>
-                            <a:srgbClr val="1E293B"/>
+                            <a:srgbClr val="0F2942"/>
                           </a:solidFill>
                           <a:latin typeface="Malgun Gothic"/>
                         </a:rPr>
@@ -40844,11 +40844,11 @@
                       <a:r>
                         <a:rPr sz="660" b="0">
                           <a:solidFill>
-                            <a:srgbClr val="1E293B"/>
+                            <a:srgbClr val="0F2942"/>
                           </a:solidFill>
                           <a:latin typeface="Malgun Gothic"/>
                         </a:rPr>
-                        <a:t>ap-syncguard-ai-dev</a:t>
+                        <a:t>ap-syncflow-ai-dev</a:t>
                       </a:r>
                       <a:endParaRPr sz="1400" u="none" cap="none" strike="noStrike"/>
                     </a:p>
@@ -40857,7 +40857,7 @@
                       <a:r>
                         <a:rPr sz="660" b="0">
                           <a:solidFill>
-                            <a:srgbClr val="1E293B"/>
+                            <a:srgbClr val="0F2942"/>
                           </a:solidFill>
                           <a:latin typeface="Malgun Gothic"/>
                         </a:rPr>
@@ -40896,7 +40896,7 @@
                       <a:r>
                         <a:rPr sz="660" b="0">
                           <a:solidFill>
-                            <a:srgbClr val="1E293B"/>
+                            <a:srgbClr val="0F2942"/>
                           </a:solidFill>
                           <a:latin typeface="Malgun Gothic"/>
                         </a:rPr>
@@ -40936,7 +40936,7 @@
                       <a:r>
                         <a:rPr sz="660" b="0">
                           <a:solidFill>
-                            <a:srgbClr val="1E293B"/>
+                            <a:srgbClr val="0F2942"/>
                           </a:solidFill>
                           <a:latin typeface="Malgun Gothic"/>
                         </a:rPr>
@@ -41334,7 +41334,7 @@
                       <a:r>
                         <a:rPr sz="660" b="1">
                           <a:solidFill>
-                            <a:srgbClr val="1E293B"/>
+                            <a:srgbClr val="0F2942"/>
                           </a:solidFill>
                           <a:latin typeface="Malgun Gothic"/>
                         </a:rPr>
@@ -41374,7 +41374,7 @@
                       <a:r>
                         <a:rPr sz="660" b="1">
                           <a:solidFill>
-                            <a:srgbClr val="1E293B"/>
+                            <a:srgbClr val="0F2942"/>
                           </a:solidFill>
                           <a:latin typeface="Malgun Gothic"/>
                         </a:rPr>
@@ -41414,11 +41414,11 @@
                       <a:r>
                         <a:rPr sz="660" b="1">
                           <a:solidFill>
-                            <a:srgbClr val="1E293B"/>
+                            <a:srgbClr val="0F2942"/>
                           </a:solidFill>
                           <a:latin typeface="Malgun Gothic"/>
                         </a:rPr>
-                        <a:t>BO 전용 ALB (syncguard-ai-bo-prv-alb)</a:t>
+                        <a:t>BO 전용 ALB (syncflow-ai-bo-prv-alb)</a:t>
                       </a:r>
                       <a:endParaRPr sz="1400" u="none" cap="none" strike="noStrike"/>
                     </a:p>
@@ -41427,11 +41427,11 @@
                       <a:r>
                         <a:rPr sz="660" b="1">
                           <a:solidFill>
-                            <a:srgbClr val="1E293B"/>
+                            <a:srgbClr val="0F2942"/>
                           </a:solidFill>
                           <a:latin typeface="Malgun Gothic"/>
                         </a:rPr>
-                        <a:t>[Domain] https://claim.hanbitglobal.com</a:t>
+                        <a:t>[Domain] https://Spec.hanbitglobal.com</a:t>
                       </a:r>
                     </a:p>
                   </a:txBody>
@@ -41466,7 +41466,7 @@
                       <a:r>
                         <a:rPr sz="660" b="0">
                           <a:solidFill>
-                            <a:srgbClr val="1E293B"/>
+                            <a:srgbClr val="0F2942"/>
                           </a:solidFill>
                           <a:latin typeface="Malgun Gothic"/>
                         </a:rPr>
@@ -41506,7 +41506,7 @@
                       <a:r>
                         <a:rPr sz="660" b="0">
                           <a:solidFill>
-                            <a:srgbClr val="1E293B"/>
+                            <a:srgbClr val="0F2942"/>
                           </a:solidFill>
                           <a:latin typeface="Malgun Gothic"/>
                         </a:rPr>
@@ -41546,11 +41546,11 @@
                       <a:r>
                         <a:rPr sz="660" b="0">
                           <a:solidFill>
-                            <a:srgbClr val="1E293B"/>
+                            <a:srgbClr val="0F2942"/>
                           </a:solidFill>
                           <a:latin typeface="Malgun Gothic"/>
                         </a:rPr>
-                        <a:t>[BO ALB 사용자대역 오픈] RA·관리자 통합 웹(:3104) 및 업무BE(:18080) 접속 · 웹 영상 재생 및 장면 추가/편집/삭제 보정</a:t>
+                        <a:t>[BO ALB 사용자대역 오픈] QA·관리자 통합 웹(:3104) 및 업무BE(:18080) 접속 · 웹 영상 재생 및 장면 추가/편집/삭제 보정</a:t>
                       </a:r>
                       <a:endParaRPr sz="1400" u="none" cap="none" strike="noStrike"/>
                     </a:p>
@@ -41588,7 +41588,7 @@
                       <a:r>
                         <a:rPr sz="660" b="1">
                           <a:solidFill>
-                            <a:srgbClr val="1E293B"/>
+                            <a:srgbClr val="0F2942"/>
                           </a:solidFill>
                           <a:latin typeface="Malgun Gothic"/>
                         </a:rPr>
@@ -41628,11 +41628,11 @@
                       <a:r>
                         <a:rPr sz="660" b="1">
                           <a:solidFill>
-                            <a:srgbClr val="1E293B"/>
+                            <a:srgbClr val="0F2942"/>
                           </a:solidFill>
                           <a:latin typeface="Malgun Gothic"/>
                         </a:rPr>
-                        <a:t>마케팅허브(MarketingHub) AP 서버 (단독)</a:t>
+                        <a:t>전자구매포털(SRM-Portal) HB 서버 (단독)</a:t>
                       </a:r>
                       <a:endParaRPr sz="1400" u="none" cap="none" strike="noStrike"/>
                     </a:p>
@@ -41668,11 +41668,11 @@
                       <a:r>
                         <a:rPr sz="660" b="1">
                           <a:solidFill>
-                            <a:srgbClr val="1E293B"/>
+                            <a:srgbClr val="0F2942"/>
                           </a:solidFill>
                           <a:latin typeface="Malgun Gothic"/>
                         </a:rPr>
-                        <a:t>대외 연계 전용 ALB (syncguard-ai-api-prv-alb)</a:t>
+                        <a:t>대외 연계 전용 ALB (syncflow-ai-api-prv-alb)</a:t>
                       </a:r>
                       <a:endParaRPr sz="1400" u="none" cap="none" strike="noStrike"/>
                     </a:p>
@@ -41681,11 +41681,11 @@
                       <a:r>
                         <a:rPr sz="660" b="1">
                           <a:solidFill>
-                            <a:srgbClr val="1E293B"/>
+                            <a:srgbClr val="0F2942"/>
                           </a:solidFill>
                           <a:latin typeface="Malgun Gothic"/>
                         </a:rPr>
-                        <a:t>[Domain] https://syncguard-api.hanbitglobal.com</a:t>
+                        <a:t>[Domain] https://syncflow-api.hanbitglobal.com</a:t>
                       </a:r>
                     </a:p>
                   </a:txBody>
@@ -41720,7 +41720,7 @@
                       <a:r>
                         <a:rPr sz="660" b="0">
                           <a:solidFill>
-                            <a:srgbClr val="1E293B"/>
+                            <a:srgbClr val="0F2942"/>
                           </a:solidFill>
                           <a:latin typeface="Malgun Gothic"/>
                         </a:rPr>
@@ -41760,7 +41760,7 @@
                       <a:r>
                         <a:rPr sz="660" b="0">
                           <a:solidFill>
-                            <a:srgbClr val="1E293B"/>
+                            <a:srgbClr val="0F2942"/>
                           </a:solidFill>
                           <a:latin typeface="Malgun Gothic"/>
                         </a:rPr>
@@ -41800,11 +41800,11 @@
                       <a:r>
                         <a:rPr sz="660" b="0">
                           <a:solidFill>
-                            <a:srgbClr val="1E293B"/>
+                            <a:srgbClr val="0F2942"/>
                           </a:solidFill>
                           <a:latin typeface="Malgun Gothic"/>
                         </a:rPr>
-                        <a:t>[대외연계 ALB 마케팅허브 서버만 오픈] 마케팅허브 ➔ 대외연계 API(:18085) 심의 의뢰 수신 및 파일 업로드 (일반 사용자대역 차단)</a:t>
+                        <a:t>[대외연계 ALB 전자구매포털 서버만 오픈] 전자구매포털 ➔ 대외연계 API(:18085) 검증 요청 수신 및 파일 업로드 (일반 사용자대역 차단)</a:t>
                       </a:r>
                       <a:endParaRPr sz="1400" u="none" cap="none" strike="noStrike"/>
                     </a:p>
@@ -41842,7 +41842,7 @@
                       <a:r>
                         <a:rPr sz="660" b="1">
                           <a:solidFill>
-                            <a:srgbClr val="1E293B"/>
+                            <a:srgbClr val="0F2942"/>
                           </a:solidFill>
                           <a:latin typeface="Malgun Gothic"/>
                         </a:rPr>
@@ -41882,7 +41882,7 @@
                       <a:r>
                         <a:rPr sz="660" b="1">
                           <a:solidFill>
-                            <a:srgbClr val="1E293B"/>
+                            <a:srgbClr val="0F2942"/>
                           </a:solidFill>
                           <a:latin typeface="Malgun Gothic"/>
                         </a:rPr>
@@ -41922,11 +41922,11 @@
                       <a:r>
                         <a:rPr sz="660" b="1">
                           <a:solidFill>
-                            <a:srgbClr val="1E293B"/>
+                            <a:srgbClr val="0F2942"/>
                           </a:solidFill>
                           <a:latin typeface="Malgun Gothic"/>
                         </a:rPr>
-                        <a:t>AI Agent (http://syncguard-ai-agent-svc:18083)</a:t>
+                        <a:t>AI Agent (http://syncflow-ai-agent-svc:18083)</a:t>
                       </a:r>
                       <a:endParaRPr sz="1400" u="none" cap="none" strike="noStrike"/>
                     </a:p>
@@ -41935,11 +41935,11 @@
                       <a:r>
                         <a:rPr sz="660" b="1">
                           <a:solidFill>
-                            <a:srgbClr val="1E293B"/>
+                            <a:srgbClr val="0F2942"/>
                           </a:solidFill>
                           <a:latin typeface="Malgun Gothic"/>
                         </a:rPr>
-                        <a:t>RDS(syncguard-db.hanbitglobal.com) · S3 Endpoint</a:t>
+                        <a:t>RDS(syncflow-db.hanbitglobal.com) · S3 Endpoint</a:t>
                       </a:r>
                     </a:p>
                   </a:txBody>
@@ -41974,7 +41974,7 @@
                       <a:r>
                         <a:rPr sz="660" b="0">
                           <a:solidFill>
-                            <a:srgbClr val="1E293B"/>
+                            <a:srgbClr val="0F2942"/>
                           </a:solidFill>
                           <a:latin typeface="Malgun Gothic"/>
                         </a:rPr>
@@ -42014,7 +42014,7 @@
                       <a:r>
                         <a:rPr sz="660" b="0">
                           <a:solidFill>
-                            <a:srgbClr val="1E293B"/>
+                            <a:srgbClr val="0F2942"/>
                           </a:solidFill>
                           <a:latin typeface="Malgun Gothic"/>
                         </a:rPr>
@@ -42054,7 +42054,7 @@
                       <a:r>
                         <a:rPr sz="660" b="0">
                           <a:solidFill>
-                            <a:srgbClr val="1E293B"/>
+                            <a:srgbClr val="0F2942"/>
                           </a:solidFill>
                           <a:latin typeface="Malgun Gothic"/>
                         </a:rPr>
@@ -42096,7 +42096,7 @@
                       <a:r>
                         <a:rPr sz="660" b="1">
                           <a:solidFill>
-                            <a:srgbClr val="1E293B"/>
+                            <a:srgbClr val="0F2942"/>
                           </a:solidFill>
                           <a:latin typeface="Malgun Gothic"/>
                         </a:rPr>
@@ -42136,7 +42136,7 @@
                       <a:r>
                         <a:rPr sz="660" b="1">
                           <a:solidFill>
-                            <a:srgbClr val="1E293B"/>
+                            <a:srgbClr val="0F2942"/>
                           </a:solidFill>
                           <a:latin typeface="Malgun Gothic"/>
                         </a:rPr>
@@ -42176,11 +42176,11 @@
                       <a:r>
                         <a:rPr sz="660" b="1">
                           <a:solidFill>
-                            <a:srgbClr val="1E293B"/>
+                            <a:srgbClr val="0F2942"/>
                           </a:solidFill>
                           <a:latin typeface="Malgun Gothic"/>
                         </a:rPr>
-                        <a:t>네이버 클로바 OCR (Naver Cloud CLOVA OCR)</a:t>
+                        <a:t>엔터프라이즈 비전 OCR (Enterprise Vision OCR)</a:t>
                       </a:r>
                       <a:endParaRPr sz="1400" u="none" cap="none" strike="noStrike"/>
                     </a:p>
@@ -42189,11 +42189,11 @@
                       <a:r>
                         <a:rPr sz="660" b="1">
                           <a:solidFill>
-                            <a:srgbClr val="1E293B"/>
+                            <a:srgbClr val="0F2942"/>
                           </a:solidFill>
                           <a:latin typeface="Malgun Gothic"/>
                         </a:rPr>
-                        <a:t>[Outbound URL] https://*.apigw.ntruss.com</a:t>
+                        <a:t>[Outbound URL] https://ocr-api.hanbitglobal.internal</a:t>
                       </a:r>
                     </a:p>
                   </a:txBody>
@@ -42228,7 +42228,7 @@
                       <a:r>
                         <a:rPr sz="660" b="0">
                           <a:solidFill>
-                            <a:srgbClr val="1E293B"/>
+                            <a:srgbClr val="0F2942"/>
                           </a:solidFill>
                           <a:latin typeface="Malgun Gothic"/>
                         </a:rPr>
@@ -42268,7 +42268,7 @@
                       <a:r>
                         <a:rPr sz="660" b="0">
                           <a:solidFill>
-                            <a:srgbClr val="1E293B"/>
+                            <a:srgbClr val="0F2942"/>
                           </a:solidFill>
                           <a:latin typeface="Malgun Gothic"/>
                         </a:rPr>
@@ -42308,11 +42308,11 @@
                       <a:r>
                         <a:rPr sz="660" b="0">
                           <a:solidFill>
-                            <a:srgbClr val="1E293B"/>
+                            <a:srgbClr val="0F2942"/>
                           </a:solidFill>
                           <a:latin typeface="Malgun Gothic"/>
                         </a:rPr>
-                        <a:t>[네이버 OCR 방화벽 추가] 이미지 시안·AI 추출 피크프레임·웹 사용자 보정 캡처 장면 한글/영문 OCR 호출 (연구소 계약 APIGW URL)</a:t>
+                        <a:t>[엔터프라이즈 비전 OCR 방화벽 추가] 이미지 계약·도서·AI 추출 도면스냅샷·웹 사용자 보정 도면 스냅샷 한글/영문 OCR 호출 (연구소 계약 APIGW URL)</a:t>
                       </a:r>
                       <a:endParaRPr sz="1400" u="none" cap="none" strike="noStrike"/>
                     </a:p>
@@ -42350,7 +42350,7 @@
                       <a:r>
                         <a:rPr sz="660" b="1">
                           <a:solidFill>
-                            <a:srgbClr val="1E293B"/>
+                            <a:srgbClr val="0F2942"/>
                           </a:solidFill>
                           <a:latin typeface="Malgun Gothic"/>
                         </a:rPr>
@@ -42390,7 +42390,7 @@
                       <a:r>
                         <a:rPr sz="660" b="1">
                           <a:solidFill>
-                            <a:srgbClr val="1E293B"/>
+                            <a:srgbClr val="0F2942"/>
                           </a:solidFill>
                           <a:latin typeface="Malgun Gothic"/>
                         </a:rPr>
@@ -42430,7 +42430,7 @@
                       <a:r>
                         <a:rPr sz="660" b="1">
                           <a:solidFill>
-                            <a:srgbClr val="1E293B"/>
+                            <a:srgbClr val="0F2942"/>
                           </a:solidFill>
                           <a:latin typeface="Malgun Gothic"/>
                         </a:rPr>
@@ -42443,7 +42443,7 @@
                       <a:r>
                         <a:rPr sz="660" b="1">
                           <a:solidFill>
-                            <a:srgbClr val="1E293B"/>
+                            <a:srgbClr val="0F2942"/>
                           </a:solidFill>
                           <a:latin typeface="Malgun Gothic"/>
                         </a:rPr>
@@ -42482,7 +42482,7 @@
                       <a:r>
                         <a:rPr sz="660" b="0">
                           <a:solidFill>
-                            <a:srgbClr val="1E293B"/>
+                            <a:srgbClr val="0F2942"/>
                           </a:solidFill>
                           <a:latin typeface="Malgun Gothic"/>
                         </a:rPr>
@@ -42522,7 +42522,7 @@
                       <a:r>
                         <a:rPr sz="660" b="0">
                           <a:solidFill>
-                            <a:srgbClr val="1E293B"/>
+                            <a:srgbClr val="0F2942"/>
                           </a:solidFill>
                           <a:latin typeface="Malgun Gothic"/>
                         </a:rPr>
@@ -42562,11 +42562,11 @@
                       <a:r>
                         <a:rPr sz="660" b="0">
                           <a:solidFill>
-                            <a:srgbClr val="1E293B"/>
+                            <a:srgbClr val="0F2942"/>
                           </a:solidFill>
                           <a:latin typeface="Malgun Gothic"/>
                         </a:rPr>
-                        <a:t>[Outbound URL 명시] 비학습(Zero Data Retention) 상용 LLM 3단계 심의 판정 및 1536차원 임베딩 API 호출</a:t>
+                        <a:t>[Outbound URL 명시] 비학습(Zero Data Retention) 상용 LLM 3단계 검증 판정 및 1536차원 임베딩 API 호출</a:t>
                       </a:r>
                       <a:endParaRPr sz="1400" u="none" cap="none" strike="noStrike"/>
                     </a:p>
@@ -42604,7 +42604,7 @@
                       <a:r>
                         <a:rPr sz="660" b="1">
                           <a:solidFill>
-                            <a:srgbClr val="1E293B"/>
+                            <a:srgbClr val="0F2942"/>
                           </a:solidFill>
                           <a:latin typeface="Malgun Gothic"/>
                         </a:rPr>
@@ -42644,7 +42644,7 @@
                       <a:r>
                         <a:rPr sz="660" b="1">
                           <a:solidFill>
-                            <a:srgbClr val="1E293B"/>
+                            <a:srgbClr val="0F2942"/>
                           </a:solidFill>
                           <a:latin typeface="Malgun Gothic"/>
                         </a:rPr>
@@ -42684,11 +42684,11 @@
                       <a:r>
                         <a:rPr sz="660" b="1">
                           <a:solidFill>
-                            <a:srgbClr val="1E293B"/>
+                            <a:srgbClr val="0F2942"/>
                           </a:solidFill>
                           <a:latin typeface="Malgun Gothic"/>
                         </a:rPr>
-                        <a:t>마케팅허브(MarketingHub) 콜백 API &amp; 전성분 RDB 서버</a:t>
+                        <a:t>전자구매포털(SRM-Portal) 콜백 API &amp; 자재BOM RDB 서버</a:t>
                       </a:r>
                       <a:endParaRPr sz="1400" u="none" cap="none" strike="noStrike"/>
                     </a:p>
@@ -42697,11 +42697,11 @@
                       <a:r>
                         <a:rPr sz="660" b="1">
                           <a:solidFill>
-                            <a:srgbClr val="1E293B"/>
+                            <a:srgbClr val="0F2942"/>
                           </a:solidFill>
                           <a:latin typeface="Malgun Gothic"/>
                         </a:rPr>
-                        <a:t>[Outbound URL] https://mkthub-api.hanbitglobal.com</a:t>
+                        <a:t>[Outbound URL] https://srm-api.hanbitglobal.com</a:t>
                       </a:r>
                     </a:p>
                   </a:txBody>
@@ -42736,7 +42736,7 @@
                       <a:r>
                         <a:rPr sz="660" b="0">
                           <a:solidFill>
-                            <a:srgbClr val="1E293B"/>
+                            <a:srgbClr val="0F2942"/>
                           </a:solidFill>
                           <a:latin typeface="Malgun Gothic"/>
                         </a:rPr>
@@ -42776,7 +42776,7 @@
                       <a:r>
                         <a:rPr sz="660" b="0">
                           <a:solidFill>
-                            <a:srgbClr val="1E293B"/>
+                            <a:srgbClr val="0F2942"/>
                           </a:solidFill>
                           <a:latin typeface="Malgun Gothic"/>
                         </a:rPr>
@@ -42816,11 +42816,11 @@
                       <a:r>
                         <a:rPr sz="660" b="0">
                           <a:solidFill>
-                            <a:srgbClr val="1E293B"/>
+                            <a:srgbClr val="0F2942"/>
                           </a:solidFill>
                           <a:latin typeface="Malgun Gothic"/>
                         </a:rPr>
-                        <a:t>[Outbound URL/서버 명시] SyncGuard AI ➔ 마케팅허브 심의 확정 결과(HTML/JSON/PDF) 웹훅 회신 및 마케팅허브 전성분·배합한도 RDB 조회</a:t>
+                        <a:t>[Outbound URL/서버 명시] SyncFlow AI ➔ 전자구매포털 검증 확정 결과(HTML/JSON/PDF) 웹훅 회신 및 전자구매포털 자재BOM·유해물질한도 RDB 조회</a:t>
                       </a:r>
                       <a:endParaRPr sz="1400" u="none" cap="none" strike="noStrike"/>
                     </a:p>
@@ -42858,7 +42858,7 @@
                       <a:r>
                         <a:rPr sz="660" b="1">
                           <a:solidFill>
-                            <a:srgbClr val="1E293B"/>
+                            <a:srgbClr val="0F2942"/>
                           </a:solidFill>
                           <a:latin typeface="Malgun Gothic"/>
                         </a:rPr>
@@ -42898,7 +42898,7 @@
                       <a:r>
                         <a:rPr sz="660" b="1">
                           <a:solidFill>
-                            <a:srgbClr val="1E293B"/>
+                            <a:srgbClr val="0F2942"/>
                           </a:solidFill>
                           <a:latin typeface="Malgun Gothic"/>
                         </a:rPr>
@@ -42938,11 +42938,11 @@
                       <a:r>
                         <a:rPr sz="660" b="1">
                           <a:solidFill>
-                            <a:srgbClr val="1E293B"/>
+                            <a:srgbClr val="0F2942"/>
                           </a:solidFill>
                           <a:latin typeface="Malgun Gothic"/>
                         </a:rPr>
-                        <a:t>ProductLab (https://productlab-core.hanbitglobal.com)</a:t>
+                        <a:t>PLM-Nexus (https://plmnexus-core.hanbitglobal.com)</a:t>
                       </a:r>
                       <a:endParaRPr sz="1400" u="none" cap="none" strike="noStrike"/>
                     </a:p>
@@ -42951,7 +42951,7 @@
                       <a:r>
                         <a:rPr sz="660" b="1">
                           <a:solidFill>
-                            <a:srgbClr val="1E293B"/>
+                            <a:srgbClr val="0F2942"/>
                           </a:solidFill>
                           <a:latin typeface="Malgun Gothic"/>
                         </a:rPr>
@@ -42990,7 +42990,7 @@
                       <a:r>
                         <a:rPr sz="660" b="0">
                           <a:solidFill>
-                            <a:srgbClr val="1E293B"/>
+                            <a:srgbClr val="0F2942"/>
                           </a:solidFill>
                           <a:latin typeface="Malgun Gothic"/>
                         </a:rPr>
@@ -43030,7 +43030,7 @@
                       <a:r>
                         <a:rPr sz="660" b="0">
                           <a:solidFill>
-                            <a:srgbClr val="1E293B"/>
+                            <a:srgbClr val="0F2942"/>
                           </a:solidFill>
                           <a:latin typeface="Malgun Gothic"/>
                         </a:rPr>
@@ -43070,11 +43070,11 @@
                       <a:r>
                         <a:rPr sz="660" b="0">
                           <a:solidFill>
-                            <a:srgbClr val="1E293B"/>
+                            <a:srgbClr val="0F2942"/>
                           </a:solidFill>
                           <a:latin typeface="Malgun Gothic"/>
                         </a:rPr>
-                        <a:t>[Outbound URL/서버 명시] 매일 02:00 ProductLab 실증배치 수집, HB-SSO SSO/IAM 권한 검증 및 연구원 실증요청 메일(SMTP) 발송</a:t>
+                        <a:t>[Outbound URL/서버 명시] 매일 02:00 PLM-Nexus 시험검증배치 수집, HB-SSO SSO/IAM 권한 검증 및 연구원 성적서요청 메일(SMTP) 발송</a:t>
                       </a:r>
                       <a:endParaRPr sz="1400" u="none" cap="none" strike="noStrike"/>
                     </a:p>
@@ -43196,7 +43196,7 @@
                           </a:solidFill>
                           <a:latin typeface="Malgun Gothic"/>
                         </a:rPr>
-                        <a:t>[Option] KT 레몬(KT Lemon) API 서버</a:t>
+                        <a:t>[Option] HB-Monitor(KT Lemon) API 서버</a:t>
                       </a:r>
                       <a:endParaRPr sz="1400" u="none" cap="none" strike="noStrike"/>
                     </a:p>
@@ -43328,7 +43328,7 @@
                           </a:solidFill>
                           <a:latin typeface="Malgun Gothic"/>
                         </a:rPr>
-                        <a:t>[선택 사양 · Outbound URL 명시] 매일 02:30 KT 레몬 임상·실증 문서 동기화 및 벡터 매칭 비교 검증(PoC) 확정 시 오픈</a:t>
+                        <a:t>[선택 사양 · Outbound URL 명시] 매일 02:30 HB-Monitor 신뢰성·시험검증 문서 동기화 및 벡터 매칭 비교 검증(PoC) 확정 시 오픈</a:t>
                       </a:r>
                       <a:endParaRPr sz="1400" u="none" cap="none" strike="noStrike"/>
                     </a:p>
